--- a/docs/office/TankGuard_Presentation.pptx
+++ b/docs/office/TankGuard_Presentation.pptx
@@ -18851,7 +18851,7 @@
               <a:defRPr sz="3600" b="1"/>
             </a:pPr>
             <a:r>
-              <a:rPr sz="2000"/>
+              <a:rPr sz="3200"/>
               <a:t>TankGuard</a:t>
             </a:r>
             <a:endParaRPr b="0" i="0" sz="1600" u="none" cap="none" strike="noStrike">
@@ -18865,15 +18865,20 @@
             </a:endParaRPr>
           </a:p>
           <a:p>
+            <a:pPr algn="ctr">
+              <a:spcBef>
+                <a:spcPts val="600"/>
+              </a:spcBef>
+              <a:defRPr sz="1400"/>
+            </a:pPr>
             <a:r>
-              <a:rPr sz="2000"/>
-              <a:t>Self-powered IoT water-tank monitoring, pump control and automated sludge cleaning</a:t>
+              <a:rPr sz="1800"/>
+              <a:t>Self-Powered IoT System for In-Tank Water Quality Monitoring and Automated Sediment-Flush</a:t>
             </a:r>
-          </a:p>
-          <a:p>
+            <a:br/>
             <a:r>
-              <a:rPr sz="2000"/>
-              <a:t>Dr. Vishnu Vasudev</a:t>
+              <a:rPr sz="1800"/>
+              <a:t>Dr. Vishnu Vasudev (SBCE, Dept. of ECE)  |  Industry Collaborator: Nuke Labs  |  Theme: IoT TDP 2026 (11)  |  TRL: 6+</a:t>
             </a:r>
           </a:p>
         </p:txBody>
@@ -18910,79 +18915,6 @@
           <a:chExt cx="0" cy="0"/>
         </a:xfrm>
       </p:grpSpPr>
-      <p:sp>
-        <p:nvSpPr>
-          <p:cNvPr id="136" name="Google Shape;136;g25ace02ada9_0_40"/>
-          <p:cNvSpPr txBox="1"/>
-          <p:nvPr>
-            <p:ph idx="1" type="body"/>
-          </p:nvPr>
-        </p:nvSpPr>
-        <p:spPr>
-          <a:xfrm>
-            <a:off x="979713" y="1253331"/>
-            <a:ext cx="10515600" cy="4351338"/>
-          </a:xfrm>
-          <a:prstGeom prst="rect">
-            <a:avLst/>
-          </a:prstGeom>
-          <a:noFill/>
-          <a:ln>
-            <a:noFill/>
-          </a:ln>
-        </p:spPr>
-        <p:txBody>
-          <a:bodyPr anchorCtr="0" anchor="t" bIns="45700" lIns="91425" spcFirstLastPara="1" rIns="91425" wrap="square" tIns="45700">
-            <a:normAutofit/>
-          </a:bodyPr>
-          <a:lstStyle/>
-          <a:p>
-            <a:pPr indent="0" lvl="0" marL="0" rtl="0" algn="l">
-              <a:lnSpc>
-                <a:spcPct val="90000"/>
-              </a:lnSpc>
-              <a:spcBef>
-                <a:spcPts val="1000"/>
-              </a:spcBef>
-              <a:spcAft>
-                <a:spcPts val="0"/>
-              </a:spcAft>
-              <a:buSzPts val="1800"/>
-              <a:buNone/>
-              <a:defRPr sz="1200"/>
-            </a:pPr>
-            <a:r>
-              <a:rPr sz="1600"/>
-              <a:t>Resources and budget (indicative, excl. GST):</a:t>
-            </a:r>
-            <a:endParaRPr/>
-          </a:p>
-          <a:p>
-            <a:r>
-              <a:rPr sz="1600"/>
-              <a:t>M1 monitor: INR 6,500</a:t>
-            </a:r>
-          </a:p>
-          <a:p>
-            <a:r>
-              <a:rPr sz="1600"/>
-              <a:t>H1 home unit: INR 1,800</a:t>
-            </a:r>
-          </a:p>
-          <a:p>
-            <a:r>
-              <a:rPr sz="1600"/>
-              <a:t>C1 cleaning arm: INR 7,300</a:t>
-            </a:r>
-          </a:p>
-          <a:p>
-            <a:r>
-              <a:rPr sz="1600"/>
-              <a:t>Equipment total: INR 15,600; with contingency, overhead and faculty fee: INR 23,587.</a:t>
-            </a:r>
-          </a:p>
-        </p:txBody>
-      </p:sp>
       <p:graphicFrame>
         <p:nvGraphicFramePr>
           <p:cNvPr id="137" name="Google Shape;137;g25ace02ada9_0_40"/>
@@ -18991,7 +18923,7 @@
         </p:nvGraphicFramePr>
         <p:xfrm>
           <a:off x="849085" y="1975757"/>
-          <a:ext cx="3000000" cy="3000000"/>
+          <a:ext cx="3000000" cy="3017520"/>
         </p:xfrm>
         <a:graphic>
           <a:graphicData uri="http://schemas.openxmlformats.org/drawingml/2006/table">
@@ -19007,34 +18939,15 @@
                 <a:gridCol w="2155375"/>
                 <a:gridCol w="2155375"/>
               </a:tblGrid>
-              <a:tr h="417700">
+              <a:tr h="502920">
                 <a:tc>
                   <a:txBody>
                     <a:bodyPr/>
                     <a:lstStyle/>
                     <a:p>
-                      <a:pPr indent="0" lvl="0" marL="0" marR="0" rtl="0" algn="l">
-                        <a:lnSpc>
-                          <a:spcPct val="100000"/>
-                        </a:lnSpc>
-                        <a:spcBef>
-                          <a:spcPts val="0"/>
-                        </a:spcBef>
-                        <a:spcAft>
-                          <a:spcPts val="0"/>
-                        </a:spcAft>
-                        <a:buClr>
-                          <a:srgbClr val="000000"/>
-                        </a:buClr>
-                        <a:buSzPts val="1400"/>
-                        <a:buFont typeface="Arial"/>
-                        <a:buNone/>
-                      </a:pPr>
                       <a:r>
-                        <a:rPr lang="en-US" sz="1400" u="none" cap="none" strike="noStrike"/>
-                        <a:t>Sr. No</a:t>
+                        <a:t>No.</a:t>
                       </a:r>
-                      <a:endParaRPr sz="1400" u="none" cap="none" strike="noStrike"/>
                     </a:p>
                   </a:txBody>
                   <a:tcPr marT="45725" marB="45725" marR="91450" marL="91450"/>
@@ -19044,28 +18957,9 @@
                     <a:bodyPr/>
                     <a:lstStyle/>
                     <a:p>
-                      <a:pPr indent="0" lvl="0" marL="0" marR="0" rtl="0" algn="l">
-                        <a:lnSpc>
-                          <a:spcPct val="100000"/>
-                        </a:lnSpc>
-                        <a:spcBef>
-                          <a:spcPts val="0"/>
-                        </a:spcBef>
-                        <a:spcAft>
-                          <a:spcPts val="0"/>
-                        </a:spcAft>
-                        <a:buClr>
-                          <a:srgbClr val="000000"/>
-                        </a:buClr>
-                        <a:buSzPts val="1400"/>
-                        <a:buFont typeface="Arial"/>
-                        <a:buNone/>
-                      </a:pPr>
                       <a:r>
-                        <a:rPr lang="en-US" sz="1400" u="none" cap="none" strike="noStrike"/>
                         <a:t>Item</a:t>
                       </a:r>
-                      <a:endParaRPr sz="1400" u="none" cap="none" strike="noStrike"/>
                     </a:p>
                   </a:txBody>
                   <a:tcPr marT="45725" marB="45725" marR="91450" marL="91450"/>
@@ -19075,28 +18969,9 @@
                     <a:bodyPr/>
                     <a:lstStyle/>
                     <a:p>
-                      <a:pPr indent="0" lvl="0" marL="0" marR="0" rtl="0" algn="l">
-                        <a:lnSpc>
-                          <a:spcPct val="100000"/>
-                        </a:lnSpc>
-                        <a:spcBef>
-                          <a:spcPts val="0"/>
-                        </a:spcBef>
-                        <a:spcAft>
-                          <a:spcPts val="0"/>
-                        </a:spcAft>
-                        <a:buClr>
-                          <a:srgbClr val="000000"/>
-                        </a:buClr>
-                        <a:buSzPts val="1400"/>
-                        <a:buFont typeface="Arial"/>
-                        <a:buNone/>
-                      </a:pPr>
                       <a:r>
-                        <a:rPr lang="en-US"/>
-                        <a:t>T0</a:t>
+                        <a:t>Specification</a:t>
                       </a:r>
-                      <a:endParaRPr sz="1400" u="none" cap="none" strike="noStrike"/>
                     </a:p>
                   </a:txBody>
                   <a:tcPr marT="45725" marB="45725" marR="91450" marL="91450"/>
@@ -19106,28 +18981,9 @@
                     <a:bodyPr/>
                     <a:lstStyle/>
                     <a:p>
-                      <a:pPr indent="0" lvl="0" marL="0" marR="0" rtl="0" algn="l">
-                        <a:lnSpc>
-                          <a:spcPct val="100000"/>
-                        </a:lnSpc>
-                        <a:spcBef>
-                          <a:spcPts val="0"/>
-                        </a:spcBef>
-                        <a:spcAft>
-                          <a:spcPts val="0"/>
-                        </a:spcAft>
-                        <a:buClr>
-                          <a:srgbClr val="000000"/>
-                        </a:buClr>
-                        <a:buSzPts val="1400"/>
-                        <a:buFont typeface="Arial"/>
-                        <a:buNone/>
-                      </a:pPr>
                       <a:r>
-                        <a:rPr lang="en-US"/>
-                        <a:t>T0+6 </a:t>
+                        <a:t>Amount (INR)</a:t>
                       </a:r>
-                      <a:endParaRPr sz="1400" u="none" cap="none" strike="noStrike"/>
                     </a:p>
                   </a:txBody>
                   <a:tcPr marT="45725" marB="45725" marR="91450" marL="91450"/>
@@ -19137,64 +18993,23 @@
                     <a:bodyPr/>
                     <a:lstStyle/>
                     <a:p>
-                      <a:pPr indent="0" lvl="0" marL="0" marR="0" rtl="0" algn="l">
-                        <a:lnSpc>
-                          <a:spcPct val="100000"/>
-                        </a:lnSpc>
-                        <a:spcBef>
-                          <a:spcPts val="0"/>
-                        </a:spcBef>
-                        <a:spcAft>
-                          <a:spcPts val="0"/>
-                        </a:spcAft>
-                        <a:buClr>
-                          <a:srgbClr val="000000"/>
-                        </a:buClr>
-                        <a:buSzPts val="1400"/>
-                        <a:buFont typeface="Arial"/>
-                        <a:buNone/>
-                      </a:pPr>
                       <a:r>
-                        <a:rPr lang="en-US" sz="1400" u="none" cap="none" strike="noStrike"/>
-                        <a:t>Total (Add more columns if requir</a:t>
+                        <a:t>Phase</a:t>
                       </a:r>
-                      <a:r>
-                        <a:rPr lang="en-US"/>
-                        <a:t>ed)</a:t>
-                      </a:r>
-                      <a:endParaRPr sz="1400" u="none" cap="none" strike="noStrike"/>
                     </a:p>
                   </a:txBody>
                   <a:tcPr marT="45725" marB="45725" marR="91450" marL="91450"/>
                 </a:tc>
               </a:tr>
-              <a:tr h="558600">
+              <a:tr h="502920">
                 <a:tc>
                   <a:txBody>
                     <a:bodyPr/>
                     <a:lstStyle/>
                     <a:p>
-                      <a:pPr indent="0" lvl="0" marL="0" marR="0" rtl="0" algn="l">
-                        <a:lnSpc>
-                          <a:spcPct val="100000"/>
-                        </a:lnSpc>
-                        <a:spcBef>
-                          <a:spcPts val="0"/>
-                        </a:spcBef>
-                        <a:spcAft>
-                          <a:spcPts val="0"/>
-                        </a:spcAft>
-                        <a:buClr>
-                          <a:srgbClr val="000000"/>
-                        </a:buClr>
-                        <a:buSzPts val="1400"/>
-                        <a:buFont typeface="Arial"/>
-                        <a:buNone/>
-                      </a:pPr>
                       <a:r>
-                        <a:t/>
+                        <a:t>1</a:t>
                       </a:r>
-                      <a:endParaRPr sz="1400" u="none" cap="none" strike="noStrike"/>
                     </a:p>
                   </a:txBody>
                   <a:tcPr marT="45725" marB="45725" marR="91450" marL="91450"/>
@@ -19204,27 +19019,9 @@
                     <a:bodyPr/>
                     <a:lstStyle/>
                     <a:p>
-                      <a:pPr indent="0" lvl="0" marL="0" marR="0" rtl="0" algn="l">
-                        <a:lnSpc>
-                          <a:spcPct val="100000"/>
-                        </a:lnSpc>
-                        <a:spcBef>
-                          <a:spcPts val="0"/>
-                        </a:spcBef>
-                        <a:spcAft>
-                          <a:spcPts val="0"/>
-                        </a:spcAft>
-                        <a:buClr>
-                          <a:srgbClr val="000000"/>
-                        </a:buClr>
-                        <a:buSzPts val="1400"/>
-                        <a:buFont typeface="Arial"/>
-                        <a:buNone/>
-                      </a:pPr>
                       <a:r>
-                        <a:t/>
+                        <a:t>M1 monitor</a:t>
                       </a:r>
-                      <a:endParaRPr sz="1400" u="none" cap="none" strike="noStrike"/>
                     </a:p>
                   </a:txBody>
                   <a:tcPr marT="45725" marB="45725" marR="91450" marL="91450"/>
@@ -19234,27 +19031,9 @@
                     <a:bodyPr/>
                     <a:lstStyle/>
                     <a:p>
-                      <a:pPr indent="0" lvl="0" marL="0" marR="0" rtl="0" algn="l">
-                        <a:lnSpc>
-                          <a:spcPct val="100000"/>
-                        </a:lnSpc>
-                        <a:spcBef>
-                          <a:spcPts val="0"/>
-                        </a:spcBef>
-                        <a:spcAft>
-                          <a:spcPts val="0"/>
-                        </a:spcAft>
-                        <a:buClr>
-                          <a:srgbClr val="000000"/>
-                        </a:buClr>
-                        <a:buSzPts val="1400"/>
-                        <a:buFont typeface="Arial"/>
-                        <a:buNone/>
-                      </a:pPr>
                       <a:r>
-                        <a:t/>
+                        <a:t>ESP8266 + 5 probes</a:t>
                       </a:r>
-                      <a:endParaRPr sz="1400" u="none" cap="none" strike="noStrike"/>
                     </a:p>
                   </a:txBody>
                   <a:tcPr marT="45725" marB="45725" marR="91450" marL="91450"/>
@@ -19264,27 +19043,9 @@
                     <a:bodyPr/>
                     <a:lstStyle/>
                     <a:p>
-                      <a:pPr indent="0" lvl="0" marL="0" marR="0" rtl="0" algn="l">
-                        <a:lnSpc>
-                          <a:spcPct val="100000"/>
-                        </a:lnSpc>
-                        <a:spcBef>
-                          <a:spcPts val="0"/>
-                        </a:spcBef>
-                        <a:spcAft>
-                          <a:spcPts val="0"/>
-                        </a:spcAft>
-                        <a:buClr>
-                          <a:srgbClr val="000000"/>
-                        </a:buClr>
-                        <a:buSzPts val="1400"/>
-                        <a:buFont typeface="Arial"/>
-                        <a:buNone/>
-                      </a:pPr>
                       <a:r>
-                        <a:t/>
+                        <a:t>6,500</a:t>
                       </a:r>
-                      <a:endParaRPr sz="1400" u="none" cap="none" strike="noStrike"/>
                     </a:p>
                   </a:txBody>
                   <a:tcPr marT="45725" marB="45725" marR="91450" marL="91450"/>
@@ -19294,59 +19055,23 @@
                     <a:bodyPr/>
                     <a:lstStyle/>
                     <a:p>
-                      <a:pPr indent="0" lvl="0" marL="0" marR="0" rtl="0" algn="l">
-                        <a:lnSpc>
-                          <a:spcPct val="100000"/>
-                        </a:lnSpc>
-                        <a:spcBef>
-                          <a:spcPts val="0"/>
-                        </a:spcBef>
-                        <a:spcAft>
-                          <a:spcPts val="0"/>
-                        </a:spcAft>
-                        <a:buClr>
-                          <a:srgbClr val="000000"/>
-                        </a:buClr>
-                        <a:buSzPts val="1400"/>
-                        <a:buFont typeface="Arial"/>
-                        <a:buNone/>
-                      </a:pPr>
                       <a:r>
-                        <a:t/>
+                        <a:t>T0</a:t>
                       </a:r>
-                      <a:endParaRPr sz="1400" u="none" cap="none" strike="noStrike"/>
                     </a:p>
                   </a:txBody>
                   <a:tcPr marT="45725" marB="45725" marR="91450" marL="91450"/>
                 </a:tc>
               </a:tr>
-              <a:tr h="558600">
+              <a:tr h="502920">
                 <a:tc>
                   <a:txBody>
                     <a:bodyPr/>
                     <a:lstStyle/>
                     <a:p>
-                      <a:pPr indent="0" lvl="0" marL="0" marR="0" rtl="0" algn="l">
-                        <a:lnSpc>
-                          <a:spcPct val="100000"/>
-                        </a:lnSpc>
-                        <a:spcBef>
-                          <a:spcPts val="0"/>
-                        </a:spcBef>
-                        <a:spcAft>
-                          <a:spcPts val="0"/>
-                        </a:spcAft>
-                        <a:buClr>
-                          <a:srgbClr val="000000"/>
-                        </a:buClr>
-                        <a:buSzPts val="1400"/>
-                        <a:buFont typeface="Arial"/>
-                        <a:buNone/>
-                      </a:pPr>
                       <a:r>
-                        <a:t/>
+                        <a:t>2</a:t>
                       </a:r>
-                      <a:endParaRPr sz="1400" u="none" cap="none" strike="noStrike"/>
                     </a:p>
                   </a:txBody>
                   <a:tcPr marT="45725" marB="45725" marR="91450" marL="91450"/>
@@ -19356,27 +19081,9 @@
                     <a:bodyPr/>
                     <a:lstStyle/>
                     <a:p>
-                      <a:pPr indent="0" lvl="0" marL="0" marR="0" rtl="0" algn="l">
-                        <a:lnSpc>
-                          <a:spcPct val="100000"/>
-                        </a:lnSpc>
-                        <a:spcBef>
-                          <a:spcPts val="0"/>
-                        </a:spcBef>
-                        <a:spcAft>
-                          <a:spcPts val="0"/>
-                        </a:spcAft>
-                        <a:buClr>
-                          <a:srgbClr val="000000"/>
-                        </a:buClr>
-                        <a:buSzPts val="1400"/>
-                        <a:buFont typeface="Arial"/>
-                        <a:buNone/>
-                      </a:pPr>
                       <a:r>
-                        <a:t/>
+                        <a:t>H1 home unit</a:t>
                       </a:r>
-                      <a:endParaRPr sz="1400" u="none" cap="none" strike="noStrike"/>
                     </a:p>
                   </a:txBody>
                   <a:tcPr marT="45725" marB="45725" marR="91450" marL="91450"/>
@@ -19386,27 +19093,9 @@
                     <a:bodyPr/>
                     <a:lstStyle/>
                     <a:p>
-                      <a:pPr indent="0" lvl="0" marL="0" marR="0" rtl="0" algn="l">
-                        <a:lnSpc>
-                          <a:spcPct val="100000"/>
-                        </a:lnSpc>
-                        <a:spcBef>
-                          <a:spcPts val="0"/>
-                        </a:spcBef>
-                        <a:spcAft>
-                          <a:spcPts val="0"/>
-                        </a:spcAft>
-                        <a:buClr>
-                          <a:srgbClr val="000000"/>
-                        </a:buClr>
-                        <a:buSzPts val="1400"/>
-                        <a:buFont typeface="Arial"/>
-                        <a:buNone/>
-                      </a:pPr>
                       <a:r>
-                        <a:t/>
+                        <a:t>ESP8266 + TFT + relay</a:t>
                       </a:r>
-                      <a:endParaRPr sz="1400" u="none" cap="none" strike="noStrike"/>
                     </a:p>
                   </a:txBody>
                   <a:tcPr marT="45725" marB="45725" marR="91450" marL="91450"/>
@@ -19416,27 +19105,9 @@
                     <a:bodyPr/>
                     <a:lstStyle/>
                     <a:p>
-                      <a:pPr indent="0" lvl="0" marL="0" marR="0" rtl="0" algn="l">
-                        <a:lnSpc>
-                          <a:spcPct val="100000"/>
-                        </a:lnSpc>
-                        <a:spcBef>
-                          <a:spcPts val="0"/>
-                        </a:spcBef>
-                        <a:spcAft>
-                          <a:spcPts val="0"/>
-                        </a:spcAft>
-                        <a:buClr>
-                          <a:srgbClr val="000000"/>
-                        </a:buClr>
-                        <a:buSzPts val="1400"/>
-                        <a:buFont typeface="Arial"/>
-                        <a:buNone/>
-                      </a:pPr>
                       <a:r>
-                        <a:t/>
+                        <a:t>1,800</a:t>
                       </a:r>
-                      <a:endParaRPr sz="1400" u="none" cap="none" strike="noStrike"/>
                     </a:p>
                   </a:txBody>
                   <a:tcPr marT="45725" marB="45725" marR="91450" marL="91450"/>
@@ -19446,59 +19117,23 @@
                     <a:bodyPr/>
                     <a:lstStyle/>
                     <a:p>
-                      <a:pPr indent="0" lvl="0" marL="0" marR="0" rtl="0" algn="l">
-                        <a:lnSpc>
-                          <a:spcPct val="100000"/>
-                        </a:lnSpc>
-                        <a:spcBef>
-                          <a:spcPts val="0"/>
-                        </a:spcBef>
-                        <a:spcAft>
-                          <a:spcPts val="0"/>
-                        </a:spcAft>
-                        <a:buClr>
-                          <a:srgbClr val="000000"/>
-                        </a:buClr>
-                        <a:buSzPts val="1400"/>
-                        <a:buFont typeface="Arial"/>
-                        <a:buNone/>
-                      </a:pPr>
                       <a:r>
-                        <a:t/>
+                        <a:t>T0 + 4</a:t>
                       </a:r>
-                      <a:endParaRPr sz="1400" u="none" cap="none" strike="noStrike"/>
                     </a:p>
                   </a:txBody>
                   <a:tcPr marT="45725" marB="45725" marR="91450" marL="91450"/>
                 </a:tc>
               </a:tr>
-              <a:tr h="558600">
+              <a:tr h="502920">
                 <a:tc>
                   <a:txBody>
                     <a:bodyPr/>
                     <a:lstStyle/>
                     <a:p>
-                      <a:pPr indent="0" lvl="0" marL="0" marR="0" rtl="0" algn="l">
-                        <a:lnSpc>
-                          <a:spcPct val="100000"/>
-                        </a:lnSpc>
-                        <a:spcBef>
-                          <a:spcPts val="0"/>
-                        </a:spcBef>
-                        <a:spcAft>
-                          <a:spcPts val="0"/>
-                        </a:spcAft>
-                        <a:buClr>
-                          <a:srgbClr val="000000"/>
-                        </a:buClr>
-                        <a:buSzPts val="1400"/>
-                        <a:buFont typeface="Arial"/>
-                        <a:buNone/>
-                      </a:pPr>
                       <a:r>
-                        <a:t/>
+                        <a:t>3</a:t>
                       </a:r>
-                      <a:endParaRPr sz="1400" u="none" cap="none" strike="noStrike"/>
                     </a:p>
                   </a:txBody>
                   <a:tcPr marT="45725" marB="45725" marR="91450" marL="91450"/>
@@ -19508,27 +19143,9 @@
                     <a:bodyPr/>
                     <a:lstStyle/>
                     <a:p>
-                      <a:pPr indent="0" lvl="0" marL="0" marR="0" rtl="0" algn="l">
-                        <a:lnSpc>
-                          <a:spcPct val="100000"/>
-                        </a:lnSpc>
-                        <a:spcBef>
-                          <a:spcPts val="0"/>
-                        </a:spcBef>
-                        <a:spcAft>
-                          <a:spcPts val="0"/>
-                        </a:spcAft>
-                        <a:buClr>
-                          <a:srgbClr val="000000"/>
-                        </a:buClr>
-                        <a:buSzPts val="1400"/>
-                        <a:buFont typeface="Arial"/>
-                        <a:buNone/>
-                      </a:pPr>
                       <a:r>
-                        <a:t/>
+                        <a:t>C1 cleaning arm</a:t>
                       </a:r>
-                      <a:endParaRPr sz="1400" u="none" cap="none" strike="noStrike"/>
                     </a:p>
                   </a:txBody>
                   <a:tcPr marT="45725" marB="45725" marR="91450" marL="91450"/>
@@ -19538,27 +19155,9 @@
                     <a:bodyPr/>
                     <a:lstStyle/>
                     <a:p>
-                      <a:pPr indent="0" lvl="0" marL="0" marR="0" rtl="0" algn="l">
-                        <a:lnSpc>
-                          <a:spcPct val="100000"/>
-                        </a:lnSpc>
-                        <a:spcBef>
-                          <a:spcPts val="0"/>
-                        </a:spcBef>
-                        <a:spcAft>
-                          <a:spcPts val="0"/>
-                        </a:spcAft>
-                        <a:buClr>
-                          <a:srgbClr val="000000"/>
-                        </a:buClr>
-                        <a:buSzPts val="1400"/>
-                        <a:buFont typeface="Arial"/>
-                        <a:buNone/>
-                      </a:pPr>
                       <a:r>
-                        <a:t/>
+                        <a:t>ESP32 + 2 motors + pump</a:t>
                       </a:r>
-                      <a:endParaRPr sz="1400" u="none" cap="none" strike="noStrike"/>
                     </a:p>
                   </a:txBody>
                   <a:tcPr marT="45725" marB="45725" marR="91450" marL="91450"/>
@@ -19568,27 +19167,9 @@
                     <a:bodyPr/>
                     <a:lstStyle/>
                     <a:p>
-                      <a:pPr indent="0" lvl="0" marL="0" marR="0" rtl="0" algn="l">
-                        <a:lnSpc>
-                          <a:spcPct val="100000"/>
-                        </a:lnSpc>
-                        <a:spcBef>
-                          <a:spcPts val="0"/>
-                        </a:spcBef>
-                        <a:spcAft>
-                          <a:spcPts val="0"/>
-                        </a:spcAft>
-                        <a:buClr>
-                          <a:srgbClr val="000000"/>
-                        </a:buClr>
-                        <a:buSzPts val="1400"/>
-                        <a:buFont typeface="Arial"/>
-                        <a:buNone/>
-                      </a:pPr>
                       <a:r>
-                        <a:t/>
+                        <a:t>7,300</a:t>
                       </a:r>
-                      <a:endParaRPr sz="1400" u="none" cap="none" strike="noStrike"/>
                     </a:p>
                   </a:txBody>
                   <a:tcPr marT="45725" marB="45725" marR="91450" marL="91450"/>
@@ -19598,59 +19179,81 @@
                     <a:bodyPr/>
                     <a:lstStyle/>
                     <a:p>
-                      <a:pPr indent="0" lvl="0" marL="0" marR="0" rtl="0" algn="l">
-                        <a:lnSpc>
-                          <a:spcPct val="100000"/>
-                        </a:lnSpc>
-                        <a:spcBef>
-                          <a:spcPts val="0"/>
-                        </a:spcBef>
-                        <a:spcAft>
-                          <a:spcPts val="0"/>
-                        </a:spcAft>
-                        <a:buClr>
-                          <a:srgbClr val="000000"/>
-                        </a:buClr>
-                        <a:buSzPts val="1400"/>
-                        <a:buFont typeface="Arial"/>
-                        <a:buNone/>
-                      </a:pPr>
                       <a:r>
-                        <a:t/>
+                        <a:t>T0 + 8</a:t>
                       </a:r>
-                      <a:endParaRPr sz="1400" u="none" cap="none" strike="noStrike"/>
                     </a:p>
                   </a:txBody>
                   <a:tcPr marT="45725" marB="45725" marR="91450" marL="91450"/>
                 </a:tc>
               </a:tr>
-              <a:tr h="558600">
+              <a:tr h="502920">
+                <a:tc>
+                  <a:txBody>
+                    <a:bodyPr/>
+                    <a:lstStyle/>
+                    <a:p/>
+                  </a:txBody>
+                  <a:tcPr marT="45725" marB="45725" marR="91450" marL="91450"/>
+                </a:tc>
                 <a:tc>
                   <a:txBody>
                     <a:bodyPr/>
                     <a:lstStyle/>
                     <a:p>
-                      <a:pPr indent="0" lvl="0" marL="0" marR="0" rtl="0" algn="l">
-                        <a:lnSpc>
-                          <a:spcPct val="100000"/>
-                        </a:lnSpc>
-                        <a:spcBef>
-                          <a:spcPts val="0"/>
-                        </a:spcBef>
-                        <a:spcAft>
-                          <a:spcPts val="0"/>
-                        </a:spcAft>
-                        <a:buClr>
-                          <a:srgbClr val="000000"/>
-                        </a:buClr>
-                        <a:buSzPts val="1400"/>
-                        <a:buFont typeface="Arial"/>
-                        <a:buNone/>
-                      </a:pPr>
                       <a:r>
-                        <a:t/>
+                        <a:t>Equipment total</a:t>
                       </a:r>
-                      <a:endParaRPr sz="1400" u="none" cap="none" strike="noStrike"/>
+                    </a:p>
+                  </a:txBody>
+                  <a:tcPr marT="45725" marB="45725" marR="91450" marL="91450"/>
+                </a:tc>
+                <a:tc>
+                  <a:txBody>
+                    <a:bodyPr/>
+                    <a:lstStyle/>
+                    <a:p/>
+                  </a:txBody>
+                  <a:tcPr marT="45725" marB="45725" marR="91450" marL="91450"/>
+                </a:tc>
+                <a:tc>
+                  <a:txBody>
+                    <a:bodyPr/>
+                    <a:lstStyle/>
+                    <a:p>
+                      <a:r>
+                        <a:t>15,600</a:t>
+                      </a:r>
+                    </a:p>
+                  </a:txBody>
+                  <a:tcPr marT="45725" marB="45725" marR="91450" marL="91450"/>
+                </a:tc>
+                <a:tc>
+                  <a:txBody>
+                    <a:bodyPr/>
+                    <a:lstStyle/>
+                    <a:p/>
+                  </a:txBody>
+                  <a:tcPr marT="45725" marB="45725" marR="91450" marL="91450"/>
+                </a:tc>
+              </a:tr>
+              <a:tr h="502920">
+                <a:tc>
+                  <a:txBody>
+                    <a:bodyPr/>
+                    <a:lstStyle/>
+                    <a:p/>
+                  </a:txBody>
+                  <a:tcPr marT="45725" marB="45725" marR="91450" marL="91450"/>
+                </a:tc>
+                <a:tc>
+                  <a:txBody>
+                    <a:bodyPr/>
+                    <a:lstStyle/>
+                    <a:p>
+                      <a:r>
+                        <a:t>Grand total</a:t>
+                      </a:r>
                     </a:p>
                   </a:txBody>
                   <a:tcPr marT="45725" marB="45725" marR="91450" marL="91450"/>
@@ -19660,27 +19263,9 @@
                     <a:bodyPr/>
                     <a:lstStyle/>
                     <a:p>
-                      <a:pPr indent="0" lvl="0" marL="0" marR="0" rtl="0" algn="l">
-                        <a:lnSpc>
-                          <a:spcPct val="100000"/>
-                        </a:lnSpc>
-                        <a:spcBef>
-                          <a:spcPts val="0"/>
-                        </a:spcBef>
-                        <a:spcAft>
-                          <a:spcPts val="0"/>
-                        </a:spcAft>
-                        <a:buClr>
-                          <a:srgbClr val="000000"/>
-                        </a:buClr>
-                        <a:buSzPts val="1400"/>
-                        <a:buFont typeface="Arial"/>
-                        <a:buNone/>
-                      </a:pPr>
                       <a:r>
-                        <a:t/>
+                        <a:t>incl. contingency, overhead, fee</a:t>
                       </a:r>
-                      <a:endParaRPr sz="1400" u="none" cap="none" strike="noStrike"/>
                     </a:p>
                   </a:txBody>
                   <a:tcPr marT="45725" marB="45725" marR="91450" marL="91450"/>
@@ -19690,27 +19275,9 @@
                     <a:bodyPr/>
                     <a:lstStyle/>
                     <a:p>
-                      <a:pPr indent="0" lvl="0" marL="0" marR="0" rtl="0" algn="l">
-                        <a:lnSpc>
-                          <a:spcPct val="100000"/>
-                        </a:lnSpc>
-                        <a:spcBef>
-                          <a:spcPts val="0"/>
-                        </a:spcBef>
-                        <a:spcAft>
-                          <a:spcPts val="0"/>
-                        </a:spcAft>
-                        <a:buClr>
-                          <a:srgbClr val="000000"/>
-                        </a:buClr>
-                        <a:buSzPts val="1400"/>
-                        <a:buFont typeface="Arial"/>
-                        <a:buNone/>
-                      </a:pPr>
                       <a:r>
-                        <a:t/>
+                        <a:t>23,587</a:t>
                       </a:r>
-                      <a:endParaRPr sz="1400" u="none" cap="none" strike="noStrike"/>
                     </a:p>
                   </a:txBody>
                   <a:tcPr marT="45725" marB="45725" marR="91450" marL="91450"/>
@@ -19719,211 +19286,7 @@
                   <a:txBody>
                     <a:bodyPr/>
                     <a:lstStyle/>
-                    <a:p>
-                      <a:pPr indent="0" lvl="0" marL="0" marR="0" rtl="0" algn="l">
-                        <a:lnSpc>
-                          <a:spcPct val="100000"/>
-                        </a:lnSpc>
-                        <a:spcBef>
-                          <a:spcPts val="0"/>
-                        </a:spcBef>
-                        <a:spcAft>
-                          <a:spcPts val="0"/>
-                        </a:spcAft>
-                        <a:buClr>
-                          <a:srgbClr val="000000"/>
-                        </a:buClr>
-                        <a:buSzPts val="1400"/>
-                        <a:buFont typeface="Arial"/>
-                        <a:buNone/>
-                      </a:pPr>
-                      <a:r>
-                        <a:t/>
-                      </a:r>
-                      <a:endParaRPr sz="1400" u="none" cap="none" strike="noStrike"/>
-                    </a:p>
-                  </a:txBody>
-                  <a:tcPr marT="45725" marB="45725" marR="91450" marL="91450"/>
-                </a:tc>
-                <a:tc>
-                  <a:txBody>
-                    <a:bodyPr/>
-                    <a:lstStyle/>
-                    <a:p>
-                      <a:pPr indent="0" lvl="0" marL="0" marR="0" rtl="0" algn="l">
-                        <a:lnSpc>
-                          <a:spcPct val="100000"/>
-                        </a:lnSpc>
-                        <a:spcBef>
-                          <a:spcPts val="0"/>
-                        </a:spcBef>
-                        <a:spcAft>
-                          <a:spcPts val="0"/>
-                        </a:spcAft>
-                        <a:buClr>
-                          <a:srgbClr val="000000"/>
-                        </a:buClr>
-                        <a:buSzPts val="1400"/>
-                        <a:buFont typeface="Arial"/>
-                        <a:buNone/>
-                      </a:pPr>
-                      <a:r>
-                        <a:t/>
-                      </a:r>
-                      <a:endParaRPr sz="1400" u="none" cap="none" strike="noStrike"/>
-                    </a:p>
-                  </a:txBody>
-                  <a:tcPr marT="45725" marB="45725" marR="91450" marL="91450"/>
-                </a:tc>
-              </a:tr>
-              <a:tr h="558600">
-                <a:tc>
-                  <a:txBody>
-                    <a:bodyPr/>
-                    <a:lstStyle/>
-                    <a:p>
-                      <a:pPr indent="0" lvl="0" marL="0" marR="0" rtl="0" algn="l">
-                        <a:lnSpc>
-                          <a:spcPct val="100000"/>
-                        </a:lnSpc>
-                        <a:spcBef>
-                          <a:spcPts val="0"/>
-                        </a:spcBef>
-                        <a:spcAft>
-                          <a:spcPts val="0"/>
-                        </a:spcAft>
-                        <a:buClr>
-                          <a:srgbClr val="000000"/>
-                        </a:buClr>
-                        <a:buSzPts val="1400"/>
-                        <a:buFont typeface="Arial"/>
-                        <a:buNone/>
-                      </a:pPr>
-                      <a:r>
-                        <a:t/>
-                      </a:r>
-                      <a:endParaRPr sz="1400" u="none" cap="none" strike="noStrike"/>
-                    </a:p>
-                  </a:txBody>
-                  <a:tcPr marT="45725" marB="45725" marR="91450" marL="91450"/>
-                </a:tc>
-                <a:tc>
-                  <a:txBody>
-                    <a:bodyPr/>
-                    <a:lstStyle/>
-                    <a:p>
-                      <a:pPr indent="0" lvl="0" marL="0" marR="0" rtl="0" algn="l">
-                        <a:lnSpc>
-                          <a:spcPct val="100000"/>
-                        </a:lnSpc>
-                        <a:spcBef>
-                          <a:spcPts val="0"/>
-                        </a:spcBef>
-                        <a:spcAft>
-                          <a:spcPts val="0"/>
-                        </a:spcAft>
-                        <a:buClr>
-                          <a:srgbClr val="000000"/>
-                        </a:buClr>
-                        <a:buSzPts val="1400"/>
-                        <a:buFont typeface="Arial"/>
-                        <a:buNone/>
-                      </a:pPr>
-                      <a:r>
-                        <a:t/>
-                      </a:r>
-                      <a:endParaRPr sz="1400" u="none" cap="none" strike="noStrike"/>
-                    </a:p>
-                  </a:txBody>
-                  <a:tcPr marT="45725" marB="45725" marR="91450" marL="91450"/>
-                </a:tc>
-                <a:tc>
-                  <a:txBody>
-                    <a:bodyPr/>
-                    <a:lstStyle/>
-                    <a:p>
-                      <a:pPr indent="0" lvl="0" marL="0" marR="0" rtl="0" algn="l">
-                        <a:lnSpc>
-                          <a:spcPct val="100000"/>
-                        </a:lnSpc>
-                        <a:spcBef>
-                          <a:spcPts val="0"/>
-                        </a:spcBef>
-                        <a:spcAft>
-                          <a:spcPts val="0"/>
-                        </a:spcAft>
-                        <a:buClr>
-                          <a:srgbClr val="000000"/>
-                        </a:buClr>
-                        <a:buSzPts val="1400"/>
-                        <a:buFont typeface="Arial"/>
-                        <a:buNone/>
-                      </a:pPr>
-                      <a:r>
-                        <a:t/>
-                      </a:r>
-                      <a:endParaRPr sz="1400" u="none" cap="none" strike="noStrike"/>
-                    </a:p>
-                  </a:txBody>
-                  <a:tcPr marT="45725" marB="45725" marR="91450" marL="91450"/>
-                </a:tc>
-                <a:tc>
-                  <a:txBody>
-                    <a:bodyPr/>
-                    <a:lstStyle/>
-                    <a:p>
-                      <a:pPr indent="0" lvl="0" marL="0" marR="0" rtl="0" algn="l">
-                        <a:lnSpc>
-                          <a:spcPct val="100000"/>
-                        </a:lnSpc>
-                        <a:spcBef>
-                          <a:spcPts val="0"/>
-                        </a:spcBef>
-                        <a:spcAft>
-                          <a:spcPts val="0"/>
-                        </a:spcAft>
-                        <a:buClr>
-                          <a:srgbClr val="000000"/>
-                        </a:buClr>
-                        <a:buSzPts val="1400"/>
-                        <a:buFont typeface="Arial"/>
-                        <a:buNone/>
-                      </a:pPr>
-                      <a:r>
-                        <a:t/>
-                      </a:r>
-                      <a:endParaRPr sz="1400" u="none" cap="none" strike="noStrike"/>
-                    </a:p>
-                  </a:txBody>
-                  <a:tcPr marT="45725" marB="45725" marR="91450" marL="91450"/>
-                </a:tc>
-                <a:tc>
-                  <a:txBody>
-                    <a:bodyPr/>
-                    <a:lstStyle/>
-                    <a:p>
-                      <a:pPr indent="0" lvl="0" marL="0" marR="0" rtl="0" algn="l">
-                        <a:lnSpc>
-                          <a:spcPct val="100000"/>
-                        </a:lnSpc>
-                        <a:spcBef>
-                          <a:spcPts val="0"/>
-                        </a:spcBef>
-                        <a:spcAft>
-                          <a:spcPts val="0"/>
-                        </a:spcAft>
-                        <a:buClr>
-                          <a:srgbClr val="000000"/>
-                        </a:buClr>
-                        <a:buSzPts val="1400"/>
-                        <a:buFont typeface="Arial"/>
-                        <a:buNone/>
-                      </a:pPr>
-                      <a:r>
-                        <a:t/>
-                      </a:r>
-                      <a:endParaRPr sz="1400" u="none" cap="none" strike="noStrike"/>
-                    </a:p>
+                    <a:p/>
                   </a:txBody>
                   <a:tcPr marT="45725" marB="45725" marR="91450" marL="91450"/>
                 </a:tc>
@@ -20024,59 +19387,6 @@
       </p:grpSpPr>
       <p:sp>
         <p:nvSpPr>
-          <p:cNvPr id="143" name="Google Shape;143;g25ace02ada9_0_88"/>
-          <p:cNvSpPr txBox="1"/>
-          <p:nvPr>
-            <p:ph idx="1" type="body"/>
-          </p:nvPr>
-        </p:nvSpPr>
-        <p:spPr>
-          <a:xfrm>
-            <a:off x="881062" y="1425575"/>
-            <a:ext cx="10515600" cy="1019100"/>
-          </a:xfrm>
-          <a:prstGeom prst="rect">
-            <a:avLst/>
-          </a:prstGeom>
-          <a:noFill/>
-          <a:ln>
-            <a:noFill/>
-          </a:ln>
-        </p:spPr>
-        <p:txBody>
-          <a:bodyPr anchorCtr="0" anchor="t" bIns="45700" lIns="91425" spcFirstLastPara="1" rIns="91425" wrap="square" tIns="45700">
-            <a:normAutofit/>
-          </a:bodyPr>
-          <a:lstStyle/>
-          <a:p>
-            <a:pPr indent="0" lvl="0" marL="0" rtl="0" algn="l">
-              <a:lnSpc>
-                <a:spcPct val="90000"/>
-              </a:lnSpc>
-              <a:spcBef>
-                <a:spcPts val="1000"/>
-              </a:spcBef>
-              <a:spcAft>
-                <a:spcPts val="0"/>
-              </a:spcAft>
-              <a:buClr>
-                <a:schemeClr val="dk1"/>
-              </a:buClr>
-              <a:buSzPts val="1100"/>
-              <a:buFont typeface="Arial"/>
-              <a:buNone/>
-              <a:defRPr sz="1300"/>
-            </a:pPr>
-            <a:r>
-              <a:rPr sz="1600"/>
-              <a:t>Funding so far: not yet secured. Nuke Labs is committed as the industry partner for build facilities, field access and TRL 6+ validation.</a:t>
-            </a:r>
-            <a:endParaRPr sz="2000"/>
-          </a:p>
-        </p:txBody>
-      </p:sp>
-      <p:sp>
-        <p:nvSpPr>
           <p:cNvPr id="144" name="Google Shape;144;g25ace02ada9_0_88"/>
           <p:cNvSpPr txBox="1"/>
           <p:nvPr/>
@@ -20130,6 +19440,40 @@
               <a:cs typeface="Arial"/>
               <a:sym typeface="Arial"/>
             </a:endParaRPr>
+          </a:p>
+        </p:txBody>
+      </p:sp>
+      <p:sp>
+        <p:nvSpPr>
+          <p:cNvPr id="145" name="TextBox 144"/>
+          <p:cNvSpPr txBox="1"/>
+          <p:nvPr/>
+        </p:nvSpPr>
+        <p:spPr>
+          <a:xfrm>
+            <a:off x="777240" y="1325880"/>
+            <a:ext cx="10607040" cy="4206240"/>
+          </a:xfrm>
+          <a:prstGeom prst="rect">
+            <a:avLst/>
+          </a:prstGeom>
+          <a:noFill/>
+        </p:spPr>
+        <p:txBody>
+          <a:bodyPr wrap="square">
+            <a:spAutoFit/>
+          </a:bodyPr>
+          <a:lstStyle/>
+          <a:p>
+            <a:pPr>
+              <a:spcAft>
+                <a:spcPts val="800"/>
+              </a:spcAft>
+              <a:defRPr sz="1800"/>
+            </a:pPr>
+            <a:r>
+              <a:t>Funding so far: not yet secured. Nuke Labs is committed as the industry partner for build facilities, field access and TRL 6+ validation.</a:t>
+            </a:r>
           </a:p>
         </p:txBody>
       </p:sp>
@@ -20167,71 +19511,6 @@
       </p:grpSpPr>
       <p:sp>
         <p:nvSpPr>
-          <p:cNvPr id="149" name="Google Shape;149;g25ace02ada9_0_59"/>
-          <p:cNvSpPr txBox="1"/>
-          <p:nvPr>
-            <p:ph idx="1" type="body"/>
-          </p:nvPr>
-        </p:nvSpPr>
-        <p:spPr>
-          <a:xfrm>
-            <a:off x="881062" y="1168400"/>
-            <a:ext cx="10515600" cy="4351338"/>
-          </a:xfrm>
-          <a:prstGeom prst="rect">
-            <a:avLst/>
-          </a:prstGeom>
-          <a:noFill/>
-          <a:ln>
-            <a:noFill/>
-          </a:ln>
-        </p:spPr>
-        <p:txBody>
-          <a:bodyPr anchorCtr="0" anchor="t" bIns="45700" lIns="91425" spcFirstLastPara="1" rIns="91425" wrap="square" tIns="45700">
-            <a:normAutofit/>
-          </a:bodyPr>
-          <a:lstStyle/>
-          <a:p>
-            <a:pPr indent="0" lvl="0" marL="0" rtl="0" algn="l">
-              <a:lnSpc>
-                <a:spcPct val="90000"/>
-              </a:lnSpc>
-              <a:spcBef>
-                <a:spcPts val="1000"/>
-              </a:spcBef>
-              <a:spcAft>
-                <a:spcPts val="0"/>
-              </a:spcAft>
-              <a:buSzPts val="1800"/>
-              <a:buNone/>
-              <a:defRPr sz="1300"/>
-            </a:pPr>
-            <a:r>
-              <a:rPr sz="1600"/>
-              <a:t>Team:</a:t>
-            </a:r>
-            <a:endParaRPr sz="2000">
-              <a:solidFill>
-                <a:srgbClr val="888888"/>
-              </a:solidFill>
-            </a:endParaRPr>
-          </a:p>
-          <a:p>
-            <a:r>
-              <a:rPr sz="1600"/>
-              <a:t>Principal Investigator: Dr. Vishnu Vasudev, Department of Electronics and Communication Engineering.</a:t>
-            </a:r>
-          </a:p>
-          <a:p>
-            <a:r>
-              <a:rPr sz="1600"/>
-              <a:t>Industry partner: Nuke Labs - hardware build, field installations, commercialisation.</a:t>
-            </a:r>
-          </a:p>
-        </p:txBody>
-      </p:sp>
-      <p:sp>
-        <p:nvSpPr>
           <p:cNvPr id="150" name="Google Shape;150;g25ace02ada9_0_59"/>
           <p:cNvSpPr txBox="1"/>
           <p:nvPr/>
@@ -20285,6 +19564,62 @@
               <a:cs typeface="Arial"/>
               <a:sym typeface="Arial"/>
             </a:endParaRPr>
+          </a:p>
+        </p:txBody>
+      </p:sp>
+      <p:sp>
+        <p:nvSpPr>
+          <p:cNvPr id="151" name="TextBox 150"/>
+          <p:cNvSpPr txBox="1"/>
+          <p:nvPr/>
+        </p:nvSpPr>
+        <p:spPr>
+          <a:xfrm>
+            <a:off x="777240" y="1325880"/>
+            <a:ext cx="10607040" cy="4206240"/>
+          </a:xfrm>
+          <a:prstGeom prst="rect">
+            <a:avLst/>
+          </a:prstGeom>
+          <a:noFill/>
+        </p:spPr>
+        <p:txBody>
+          <a:bodyPr wrap="square">
+            <a:spAutoFit/>
+          </a:bodyPr>
+          <a:lstStyle/>
+          <a:p>
+            <a:pPr>
+              <a:spcAft>
+                <a:spcPts val="800"/>
+              </a:spcAft>
+              <a:defRPr sz="1800"/>
+            </a:pPr>
+            <a:r>
+              <a:t>Team:</a:t>
+            </a:r>
+          </a:p>
+          <a:p>
+            <a:pPr>
+              <a:spcAft>
+                <a:spcPts val="800"/>
+              </a:spcAft>
+              <a:defRPr sz="1800"/>
+            </a:pPr>
+            <a:r>
+              <a:t>Principal Investigator: Dr. Vishnu Vasudev, Department of Electronics and Communication Engineering.</a:t>
+            </a:r>
+          </a:p>
+          <a:p>
+            <a:pPr>
+              <a:spcAft>
+                <a:spcPts val="800"/>
+              </a:spcAft>
+              <a:defRPr sz="1800"/>
+            </a:pPr>
+            <a:r>
+              <a:t>Industry partner: Nuke Labs — hardware build, field installations, commercialisation.</a:t>
+            </a:r>
           </a:p>
         </p:txBody>
       </p:sp>
@@ -20364,8 +19699,7 @@
               <a:defRPr sz="1400" b="1"/>
             </a:pPr>
             <a:r>
-              <a:rPr sz="1600"/>
-              <a:t>TankGuard turns tank maintenance from calendar guesswork into measured care: sensing at the edge, deciding locally, cleaning selectively, and showing its own evidence.</a:t>
+              <a:t>Conclusion</a:t>
             </a:r>
             <a:endParaRPr b="1" i="0" sz="2800" u="none" cap="none" strike="noStrike">
               <a:solidFill>
@@ -20376,6 +19710,40 @@
               <a:cs typeface="Arial"/>
               <a:sym typeface="Arial"/>
             </a:endParaRPr>
+          </a:p>
+        </p:txBody>
+      </p:sp>
+      <p:sp>
+        <p:nvSpPr>
+          <p:cNvPr id="156" name="TextBox 155"/>
+          <p:cNvSpPr txBox="1"/>
+          <p:nvPr/>
+        </p:nvSpPr>
+        <p:spPr>
+          <a:xfrm>
+            <a:off x="777240" y="1325880"/>
+            <a:ext cx="10607040" cy="4206240"/>
+          </a:xfrm>
+          <a:prstGeom prst="rect">
+            <a:avLst/>
+          </a:prstGeom>
+          <a:noFill/>
+        </p:spPr>
+        <p:txBody>
+          <a:bodyPr wrap="square">
+            <a:spAutoFit/>
+          </a:bodyPr>
+          <a:lstStyle/>
+          <a:p>
+            <a:pPr>
+              <a:spcAft>
+                <a:spcPts val="800"/>
+              </a:spcAft>
+              <a:defRPr sz="1800"/>
+            </a:pPr>
+            <a:r>
+              <a:t>TankGuard turns tank maintenance from calendar guesswork into measured care: sensing at the edge, deciding locally, cleaning selectively, and showing its own evidence.</a:t>
+            </a:r>
           </a:p>
         </p:txBody>
       </p:sp>
@@ -20458,92 +19826,6 @@
       </p:grpSpPr>
       <p:sp>
         <p:nvSpPr>
-          <p:cNvPr id="87" name="Google Shape;87;p2"/>
-          <p:cNvSpPr txBox="1"/>
-          <p:nvPr>
-            <p:ph idx="1" type="body"/>
-          </p:nvPr>
-        </p:nvSpPr>
-        <p:spPr>
-          <a:xfrm>
-            <a:off x="411701" y="1171921"/>
-            <a:ext cx="11368598" cy="5990670"/>
-          </a:xfrm>
-          <a:prstGeom prst="rect">
-            <a:avLst/>
-          </a:prstGeom>
-          <a:noFill/>
-          <a:ln>
-            <a:noFill/>
-          </a:ln>
-        </p:spPr>
-        <p:txBody>
-          <a:bodyPr anchorCtr="0" anchor="t" bIns="45700" lIns="91425" spcFirstLastPara="1" rIns="91425" wrap="square" tIns="45700">
-            <a:normAutofit/>
-          </a:bodyPr>
-          <a:lstStyle/>
-          <a:p>
-            <a:pPr indent="-342900" lvl="0" marL="457200" rtl="0" algn="l">
-              <a:lnSpc>
-                <a:spcPct val="90000"/>
-              </a:lnSpc>
-              <a:spcBef>
-                <a:spcPts val="1000"/>
-              </a:spcBef>
-              <a:spcAft>
-                <a:spcPts val="0"/>
-              </a:spcAft>
-              <a:buClr>
-                <a:srgbClr val="888888"/>
-              </a:buClr>
-              <a:buSzPts val="1800"/>
-              <a:buChar char="•"/>
-              <a:defRPr sz="1800" b="1"/>
-            </a:pPr>
-            <a:r>
-              <a:rPr sz="1600"/>
-              <a:t>Key Points:</a:t>
-            </a:r>
-            <a:endParaRPr sz="2000">
-              <a:solidFill>
-                <a:srgbClr val="888888"/>
-              </a:solidFill>
-            </a:endParaRPr>
-          </a:p>
-          <a:p>
-            <a:r>
-              <a:rPr sz="1600"/>
-              <a:t>- Three local units, one LAN: M1 monitor, H1 home display + pump control, C1 cleaning arm.</a:t>
-            </a:r>
-          </a:p>
-          <a:p>
-            <a:r>
-              <a:rPr sz="1600"/>
-              <a:t>- Edge-computed TankScore from five submerged probes; no cloud, no account.</a:t>
-            </a:r>
-          </a:p>
-          <a:p>
-            <a:r>
-              <a:rPr sz="1600"/>
-              <a:t>- Dashboard served by the tank unit itself, over its own Wi-Fi.</a:t>
-            </a:r>
-          </a:p>
-          <a:p>
-            <a:r>
-              <a:rPr sz="1600"/>
-              <a:t>- Cleaning arm covers 90% of the tank floor per cycle and parks at both ends.</a:t>
-            </a:r>
-          </a:p>
-          <a:p>
-            <a:r>
-              <a:rPr sz="1600"/>
-              <a:t>- TRL 6+ in 12 months with three field installations.</a:t>
-            </a:r>
-          </a:p>
-        </p:txBody>
-      </p:sp>
-      <p:sp>
-        <p:nvSpPr>
           <p:cNvPr id="88" name="Google Shape;88;p2"/>
           <p:cNvSpPr txBox="1"/>
           <p:nvPr/>
@@ -20586,7 +19868,7 @@
               <a:defRPr sz="1400" b="1"/>
             </a:pPr>
             <a:r>
-              <a:t>Guidelines</a:t>
+              <a:t>Key Points</a:t>
             </a:r>
             <a:endParaRPr b="1" i="0" sz="2800" u="none" cap="none" strike="noStrike">
               <a:solidFill>
@@ -20597,6 +19879,84 @@
               <a:cs typeface="Arial"/>
               <a:sym typeface="Arial"/>
             </a:endParaRPr>
+          </a:p>
+        </p:txBody>
+      </p:sp>
+      <p:sp>
+        <p:nvSpPr>
+          <p:cNvPr id="89" name="TextBox 88"/>
+          <p:cNvSpPr txBox="1"/>
+          <p:nvPr/>
+        </p:nvSpPr>
+        <p:spPr>
+          <a:xfrm>
+            <a:off x="777240" y="1325880"/>
+            <a:ext cx="10607040" cy="4206240"/>
+          </a:xfrm>
+          <a:prstGeom prst="rect">
+            <a:avLst/>
+          </a:prstGeom>
+          <a:noFill/>
+        </p:spPr>
+        <p:txBody>
+          <a:bodyPr wrap="square">
+            <a:spAutoFit/>
+          </a:bodyPr>
+          <a:lstStyle/>
+          <a:p>
+            <a:pPr>
+              <a:spcAft>
+                <a:spcPts val="800"/>
+              </a:spcAft>
+              <a:defRPr sz="1800"/>
+            </a:pPr>
+            <a:r>
+              <a:t>Three local units, one LAN: M1 monitor, H1 home display + pump control, C1 cleaning arm.</a:t>
+            </a:r>
+          </a:p>
+          <a:p>
+            <a:pPr>
+              <a:spcAft>
+                <a:spcPts val="800"/>
+              </a:spcAft>
+              <a:defRPr sz="1800"/>
+            </a:pPr>
+            <a:r>
+              <a:t>Edge-computed TankScore from five submerged probes; no cloud, no account.</a:t>
+            </a:r>
+          </a:p>
+          <a:p>
+            <a:pPr>
+              <a:spcAft>
+                <a:spcPts val="800"/>
+              </a:spcAft>
+              <a:defRPr sz="1800"/>
+            </a:pPr>
+            <a:r>
+              <a:t>Dashboard served by the tank unit itself, over its own Wi-Fi.</a:t>
+            </a:r>
+          </a:p>
+          <a:p>
+            <a:pPr>
+              <a:spcAft>
+                <a:spcPts val="800"/>
+              </a:spcAft>
+              <a:defRPr sz="1800"/>
+            </a:pPr>
+            <a:r>
+              <a:t>Cleaning arm covers 90% of the tank floor per cycle and parks at both ends.</a:t>
+            </a:r>
+          </a:p>
+          <a:p>
+            <a:pPr>
+              <a:spcAft>
+                <a:spcPts val="800"/>
+              </a:spcAft>
+              <a:defRPr sz="1800"/>
+            </a:pPr>
+            <a:r>
+              <a:t>TRL 6+ in 12 months with three field installations.</a:t>
+            </a:r>
           </a:p>
         </p:txBody>
       </p:sp>
@@ -20634,63 +19994,6 @@
       </p:grpSpPr>
       <p:sp>
         <p:nvSpPr>
-          <p:cNvPr id="93" name="Google Shape;93;g25ace02ada9_0_0"/>
-          <p:cNvSpPr txBox="1"/>
-          <p:nvPr>
-            <p:ph idx="1" type="body"/>
-          </p:nvPr>
-        </p:nvSpPr>
-        <p:spPr>
-          <a:xfrm>
-            <a:off x="492100" y="1113850"/>
-            <a:ext cx="10515600" cy="4351200"/>
-          </a:xfrm>
-          <a:prstGeom prst="rect">
-            <a:avLst/>
-          </a:prstGeom>
-          <a:noFill/>
-          <a:ln>
-            <a:noFill/>
-          </a:ln>
-        </p:spPr>
-        <p:txBody>
-          <a:bodyPr anchorCtr="0" anchor="t" bIns="45700" lIns="91425" spcFirstLastPara="1" rIns="91425" wrap="square" tIns="45700">
-            <a:normAutofit/>
-          </a:bodyPr>
-          <a:lstStyle/>
-          <a:p>
-            <a:pPr indent="0" lvl="0" marL="0" rtl="0" algn="l">
-              <a:lnSpc>
-                <a:spcPct val="90000"/>
-              </a:lnSpc>
-              <a:spcBef>
-                <a:spcPts val="1000"/>
-              </a:spcBef>
-              <a:spcAft>
-                <a:spcPts val="0"/>
-              </a:spcAft>
-              <a:buClr>
-                <a:schemeClr val="dk1"/>
-              </a:buClr>
-              <a:buSzPts val="1100"/>
-              <a:buFont typeface="Arial"/>
-              <a:buNone/>
-              <a:defRPr sz="1400"/>
-            </a:pPr>
-            <a:r>
-              <a:rPr sz="1600"/>
-              <a:t>Water storage tanks degrade silently: disinfectant residual dissipates within 24-48 hours, particles settle into a sludge layer, biofilm forms on the walls, and algae bloom in warm water. By the time the water smells or looks wrong it is unsafe, and the only remedy is a full drain and manual scrub that wastes the whole stored volume.</a:t>
-            </a:r>
-            <a:endParaRPr sz="2000">
-              <a:solidFill>
-                <a:srgbClr val="888888"/>
-              </a:solidFill>
-            </a:endParaRPr>
-          </a:p>
-        </p:txBody>
-      </p:sp>
-      <p:sp>
-        <p:nvSpPr>
           <p:cNvPr id="94" name="Google Shape;94;g25ace02ada9_0_0"/>
           <p:cNvSpPr txBox="1"/>
           <p:nvPr/>
@@ -20744,6 +20047,40 @@
               <a:cs typeface="Arial"/>
               <a:sym typeface="Arial"/>
             </a:endParaRPr>
+          </a:p>
+        </p:txBody>
+      </p:sp>
+      <p:sp>
+        <p:nvSpPr>
+          <p:cNvPr id="95" name="TextBox 94"/>
+          <p:cNvSpPr txBox="1"/>
+          <p:nvPr/>
+        </p:nvSpPr>
+        <p:spPr>
+          <a:xfrm>
+            <a:off x="777240" y="1325880"/>
+            <a:ext cx="10607040" cy="4206240"/>
+          </a:xfrm>
+          <a:prstGeom prst="rect">
+            <a:avLst/>
+          </a:prstGeom>
+          <a:noFill/>
+        </p:spPr>
+        <p:txBody>
+          <a:bodyPr wrap="square">
+            <a:spAutoFit/>
+          </a:bodyPr>
+          <a:lstStyle/>
+          <a:p>
+            <a:pPr>
+              <a:spcAft>
+                <a:spcPts val="800"/>
+              </a:spcAft>
+              <a:defRPr sz="1800"/>
+            </a:pPr>
+            <a:r>
+              <a:t>Water storage tanks degrade silently: disinfectant residual dissipates within 24-48 hours, particles settle into a sludge layer, biofilm forms on the walls, and algae bloom in warm water. By the time the water smells or looks wrong it is unsafe, and the only remedy is a full drain and manual scrub that wastes the whole stored volume.</a:t>
+            </a:r>
           </a:p>
         </p:txBody>
       </p:sp>
@@ -20781,55 +20118,6 @@
       </p:grpSpPr>
       <p:sp>
         <p:nvSpPr>
-          <p:cNvPr id="99" name="Google Shape;99;g25ace02ada9_0_5"/>
-          <p:cNvSpPr txBox="1"/>
-          <p:nvPr>
-            <p:ph idx="1" type="body"/>
-          </p:nvPr>
-        </p:nvSpPr>
-        <p:spPr>
-          <a:xfrm>
-            <a:off x="881062" y="988075"/>
-            <a:ext cx="10515600" cy="1244100"/>
-          </a:xfrm>
-          <a:prstGeom prst="rect">
-            <a:avLst/>
-          </a:prstGeom>
-          <a:noFill/>
-          <a:ln>
-            <a:noFill/>
-          </a:ln>
-        </p:spPr>
-        <p:txBody>
-          <a:bodyPr anchorCtr="0" anchor="t" bIns="45700" lIns="91425" spcFirstLastPara="1" rIns="91425" wrap="square" tIns="45700">
-            <a:normAutofit/>
-          </a:bodyPr>
-          <a:lstStyle/>
-          <a:p>
-            <a:pPr indent="0" lvl="0" marL="0" rtl="0" algn="l">
-              <a:lnSpc>
-                <a:spcPct val="90000"/>
-              </a:lnSpc>
-              <a:spcBef>
-                <a:spcPts val="1000"/>
-              </a:spcBef>
-              <a:spcAft>
-                <a:spcPts val="0"/>
-              </a:spcAft>
-              <a:buSzPts val="1800"/>
-              <a:buNone/>
-              <a:defRPr sz="1400"/>
-            </a:pPr>
-            <a:r>
-              <a:rPr sz="1600"/>
-              <a:t>M1 sits on the lid: five submerged probes through an ADS1115, an edge TankScore, and a web dashboard served from its own flash. H1 sits by the pump: a 1.8" display, automatic level control through an isolated relay and contactor, and a manual override. C1 is a two-link 20 cm + 20 cm arm that sweeps three concentric rings with a ring brush and draws the loosened sludge out through the centre of the head.</a:t>
-            </a:r>
-            <a:endParaRPr/>
-          </a:p>
-        </p:txBody>
-      </p:sp>
-      <p:sp>
-        <p:nvSpPr>
           <p:cNvPr id="100" name="Google Shape;100;g25ace02ada9_0_5"/>
           <p:cNvSpPr txBox="1"/>
           <p:nvPr/>
@@ -20883,6 +20171,40 @@
               <a:cs typeface="Arial"/>
               <a:sym typeface="Arial"/>
             </a:endParaRPr>
+          </a:p>
+        </p:txBody>
+      </p:sp>
+      <p:sp>
+        <p:nvSpPr>
+          <p:cNvPr id="101" name="TextBox 100"/>
+          <p:cNvSpPr txBox="1"/>
+          <p:nvPr/>
+        </p:nvSpPr>
+        <p:spPr>
+          <a:xfrm>
+            <a:off x="777240" y="1325880"/>
+            <a:ext cx="10607040" cy="4206240"/>
+          </a:xfrm>
+          <a:prstGeom prst="rect">
+            <a:avLst/>
+          </a:prstGeom>
+          <a:noFill/>
+        </p:spPr>
+        <p:txBody>
+          <a:bodyPr wrap="square">
+            <a:spAutoFit/>
+          </a:bodyPr>
+          <a:lstStyle/>
+          <a:p>
+            <a:pPr>
+              <a:spcAft>
+                <a:spcPts val="800"/>
+              </a:spcAft>
+              <a:defRPr sz="1800"/>
+            </a:pPr>
+            <a:r>
+              <a:t>M1 sits on the lid: five submerged probes through an ADS1115, an edge TankScore, and a web dashboard served from its own flash. H1 sits by the pump: a 1.8-inch display, automatic level control through an isolated relay and contactor, and a manual override. C1 is a two-link 20 cm + 20 cm arm that sweeps three concentric rings with a ring brush and draws the loosened sludge out through the centre of the head.</a:t>
+            </a:r>
           </a:p>
         </p:txBody>
       </p:sp>
@@ -20920,79 +20242,6 @@
       </p:grpSpPr>
       <p:sp>
         <p:nvSpPr>
-          <p:cNvPr id="105" name="Google Shape;105;p15"/>
-          <p:cNvSpPr txBox="1"/>
-          <p:nvPr>
-            <p:ph idx="1" type="body"/>
-          </p:nvPr>
-        </p:nvSpPr>
-        <p:spPr>
-          <a:xfrm>
-            <a:off x="881062" y="988075"/>
-            <a:ext cx="10515600" cy="1244100"/>
-          </a:xfrm>
-          <a:prstGeom prst="rect">
-            <a:avLst/>
-          </a:prstGeom>
-          <a:noFill/>
-          <a:ln>
-            <a:noFill/>
-          </a:ln>
-        </p:spPr>
-        <p:txBody>
-          <a:bodyPr anchorCtr="0" anchor="t" bIns="45700" lIns="91425" spcFirstLastPara="1" rIns="91425" wrap="square" tIns="45700">
-            <a:normAutofit/>
-          </a:bodyPr>
-          <a:lstStyle/>
-          <a:p>
-            <a:pPr indent="0" lvl="0" marL="0" rtl="0" algn="l">
-              <a:lnSpc>
-                <a:spcPct val="90000"/>
-              </a:lnSpc>
-              <a:spcBef>
-                <a:spcPts val="1000"/>
-              </a:spcBef>
-              <a:spcAft>
-                <a:spcPts val="0"/>
-              </a:spcAft>
-              <a:buSzPts val="1800"/>
-              <a:buNone/>
-              <a:defRPr sz="1300"/>
-            </a:pPr>
-            <a:r>
-              <a:rPr sz="1600"/>
-              <a:t>Unique points:</a:t>
-            </a:r>
-            <a:endParaRPr/>
-          </a:p>
-          <a:p>
-            <a:r>
-              <a:rPr sz="1600"/>
-              <a:t>1. Closed-loop care: sense, score, act, verify - with the verification shown, not claimed.</a:t>
-            </a:r>
-          </a:p>
-          <a:p>
-            <a:r>
-              <a:rPr sz="1600"/>
-              <a:t>2. Local-only architecture: no cloud path, no account, works when the internet does not.</a:t>
-            </a:r>
-          </a:p>
-          <a:p>
-            <a:r>
-              <a:rPr sz="1600"/>
-              <a:t>3. Selective cleaning: 90% floor coverage per cycle without draining the tank.</a:t>
-            </a:r>
-          </a:p>
-          <a:p>
-            <a:r>
-              <a:rPr sz="1600"/>
-              <a:t>4. Honest instrumentation: the dashboard states its data source and the arm's 2 cm wall ring.</a:t>
-            </a:r>
-          </a:p>
-        </p:txBody>
-      </p:sp>
-      <p:sp>
-        <p:nvSpPr>
           <p:cNvPr id="106" name="Google Shape;106;p15"/>
           <p:cNvSpPr txBox="1"/>
           <p:nvPr/>
@@ -21046,6 +20295,84 @@
               <a:cs typeface="Arial"/>
               <a:sym typeface="Arial"/>
             </a:endParaRPr>
+          </a:p>
+        </p:txBody>
+      </p:sp>
+      <p:sp>
+        <p:nvSpPr>
+          <p:cNvPr id="107" name="TextBox 106"/>
+          <p:cNvSpPr txBox="1"/>
+          <p:nvPr/>
+        </p:nvSpPr>
+        <p:spPr>
+          <a:xfrm>
+            <a:off x="777240" y="1325880"/>
+            <a:ext cx="10607040" cy="4206240"/>
+          </a:xfrm>
+          <a:prstGeom prst="rect">
+            <a:avLst/>
+          </a:prstGeom>
+          <a:noFill/>
+        </p:spPr>
+        <p:txBody>
+          <a:bodyPr wrap="square">
+            <a:spAutoFit/>
+          </a:bodyPr>
+          <a:lstStyle/>
+          <a:p>
+            <a:pPr>
+              <a:spcAft>
+                <a:spcPts val="800"/>
+              </a:spcAft>
+              <a:defRPr sz="1800"/>
+            </a:pPr>
+            <a:r>
+              <a:t>Unique points:</a:t>
+            </a:r>
+          </a:p>
+          <a:p>
+            <a:pPr>
+              <a:spcAft>
+                <a:spcPts val="800"/>
+              </a:spcAft>
+              <a:defRPr sz="1800"/>
+            </a:pPr>
+            <a:r>
+              <a:t>1. Closed-loop care: sense, score, act, verify — with the verification shown, not claimed.</a:t>
+            </a:r>
+          </a:p>
+          <a:p>
+            <a:pPr>
+              <a:spcAft>
+                <a:spcPts val="800"/>
+              </a:spcAft>
+              <a:defRPr sz="1800"/>
+            </a:pPr>
+            <a:r>
+              <a:t>2. Local-only architecture: no cloud path, no account, works when the internet does not.</a:t>
+            </a:r>
+          </a:p>
+          <a:p>
+            <a:pPr>
+              <a:spcAft>
+                <a:spcPts val="800"/>
+              </a:spcAft>
+              <a:defRPr sz="1800"/>
+            </a:pPr>
+            <a:r>
+              <a:t>3. Selective cleaning: 90% floor coverage per cycle without draining the tank.</a:t>
+            </a:r>
+          </a:p>
+          <a:p>
+            <a:pPr>
+              <a:spcAft>
+                <a:spcPts val="800"/>
+              </a:spcAft>
+              <a:defRPr sz="1800"/>
+            </a:pPr>
+            <a:r>
+              <a:t>4. Honest instrumentation: the dashboard states its data source and the arm's 2 cm wall ring.</a:t>
+            </a:r>
           </a:p>
         </p:txBody>
       </p:sp>
@@ -21076,79 +20403,6 @@
       </p:grpSpPr>
       <p:sp>
         <p:nvSpPr>
-          <p:cNvPr id="111" name="Google Shape;111;g25ace02ada9_0_22"/>
-          <p:cNvSpPr txBox="1"/>
-          <p:nvPr>
-            <p:ph idx="1" type="body"/>
-          </p:nvPr>
-        </p:nvSpPr>
-        <p:spPr>
-          <a:xfrm>
-            <a:off x="666750" y="1149350"/>
-            <a:ext cx="10515600" cy="4351200"/>
-          </a:xfrm>
-          <a:prstGeom prst="rect">
-            <a:avLst/>
-          </a:prstGeom>
-          <a:noFill/>
-          <a:ln>
-            <a:noFill/>
-          </a:ln>
-        </p:spPr>
-        <p:txBody>
-          <a:bodyPr anchorCtr="0" anchor="t" bIns="45700" lIns="91425" spcFirstLastPara="1" rIns="91425" wrap="square" tIns="45700">
-            <a:normAutofit/>
-          </a:bodyPr>
-          <a:lstStyle/>
-          <a:p>
-            <a:pPr indent="0" lvl="0" marL="0" rtl="0" algn="l">
-              <a:lnSpc>
-                <a:spcPct val="90000"/>
-              </a:lnSpc>
-              <a:spcBef>
-                <a:spcPts val="1000"/>
-              </a:spcBef>
-              <a:spcAft>
-                <a:spcPts val="0"/>
-              </a:spcAft>
-              <a:buSzPts val="1800"/>
-              <a:buNone/>
-              <a:defRPr sz="1300"/>
-            </a:pPr>
-            <a:r>
-              <a:rPr sz="1600"/>
-              <a:t>Quantified impact:</a:t>
-            </a:r>
-            <a:endParaRPr/>
-          </a:p>
-          <a:p>
-            <a:r>
-              <a:rPr sz="1600"/>
-              <a:t>- No full drain: cleaning removes the sludge layer, not the stored volume.</a:t>
-            </a:r>
-          </a:p>
-          <a:p>
-            <a:r>
-              <a:rPr sz="1600"/>
-              <a:t>- Pump protection: level-based automatic control with a safe manual override.</a:t>
-            </a:r>
-          </a:p>
-          <a:p>
-            <a:r>
-              <a:rPr sz="1600"/>
-              <a:t>- Early warning: a score trend catches degradation before smell or taste.</a:t>
-            </a:r>
-          </a:p>
-          <a:p>
-            <a:r>
-              <a:rPr sz="1600"/>
-              <a:t>- Off-grid: solar + battery keeps the monitor alive for weeks without sun.</a:t>
-            </a:r>
-          </a:p>
-        </p:txBody>
-      </p:sp>
-      <p:sp>
-        <p:nvSpPr>
           <p:cNvPr id="112" name="Google Shape;112;g25ace02ada9_0_22"/>
           <p:cNvSpPr txBox="1"/>
           <p:nvPr/>
@@ -21202,6 +20456,84 @@
               <a:cs typeface="Arial"/>
               <a:sym typeface="Arial"/>
             </a:endParaRPr>
+          </a:p>
+        </p:txBody>
+      </p:sp>
+      <p:sp>
+        <p:nvSpPr>
+          <p:cNvPr id="113" name="TextBox 112"/>
+          <p:cNvSpPr txBox="1"/>
+          <p:nvPr/>
+        </p:nvSpPr>
+        <p:spPr>
+          <a:xfrm>
+            <a:off x="777240" y="1325880"/>
+            <a:ext cx="10607040" cy="4206240"/>
+          </a:xfrm>
+          <a:prstGeom prst="rect">
+            <a:avLst/>
+          </a:prstGeom>
+          <a:noFill/>
+        </p:spPr>
+        <p:txBody>
+          <a:bodyPr wrap="square">
+            <a:spAutoFit/>
+          </a:bodyPr>
+          <a:lstStyle/>
+          <a:p>
+            <a:pPr>
+              <a:spcAft>
+                <a:spcPts val="800"/>
+              </a:spcAft>
+              <a:defRPr sz="1800"/>
+            </a:pPr>
+            <a:r>
+              <a:t>Quantified impact:</a:t>
+            </a:r>
+          </a:p>
+          <a:p>
+            <a:pPr>
+              <a:spcAft>
+                <a:spcPts val="800"/>
+              </a:spcAft>
+              <a:defRPr sz="1800"/>
+            </a:pPr>
+            <a:r>
+              <a:t>No full drain: cleaning removes the sludge layer, not the stored volume.</a:t>
+            </a:r>
+          </a:p>
+          <a:p>
+            <a:pPr>
+              <a:spcAft>
+                <a:spcPts val="800"/>
+              </a:spcAft>
+              <a:defRPr sz="1800"/>
+            </a:pPr>
+            <a:r>
+              <a:t>Pump protection: level-based automatic control with a safe manual override.</a:t>
+            </a:r>
+          </a:p>
+          <a:p>
+            <a:pPr>
+              <a:spcAft>
+                <a:spcPts val="800"/>
+              </a:spcAft>
+              <a:defRPr sz="1800"/>
+            </a:pPr>
+            <a:r>
+              <a:t>Early warning: a score trend catches degradation before smell or taste.</a:t>
+            </a:r>
+          </a:p>
+          <a:p>
+            <a:pPr>
+              <a:spcAft>
+                <a:spcPts val="800"/>
+              </a:spcAft>
+              <a:defRPr sz="1800"/>
+            </a:pPr>
+            <a:r>
+              <a:t>Off-grid: solar and battery keep the monitor alive for weeks without sun.</a:t>
+            </a:r>
           </a:p>
         </p:txBody>
       </p:sp>
@@ -21232,79 +20564,6 @@
       </p:grpSpPr>
       <p:sp>
         <p:nvSpPr>
-          <p:cNvPr id="117" name="Google Shape;117;g25ace02ada9_0_17"/>
-          <p:cNvSpPr txBox="1"/>
-          <p:nvPr>
-            <p:ph idx="1" type="body"/>
-          </p:nvPr>
-        </p:nvSpPr>
-        <p:spPr>
-          <a:xfrm>
-            <a:off x="554400" y="1383400"/>
-            <a:ext cx="10515600" cy="5109472"/>
-          </a:xfrm>
-          <a:prstGeom prst="rect">
-            <a:avLst/>
-          </a:prstGeom>
-          <a:noFill/>
-          <a:ln>
-            <a:noFill/>
-          </a:ln>
-        </p:spPr>
-        <p:txBody>
-          <a:bodyPr anchorCtr="0" anchor="t" bIns="45700" lIns="91425" spcFirstLastPara="1" rIns="91425" wrap="square" tIns="45700">
-            <a:normAutofit/>
-          </a:bodyPr>
-          <a:lstStyle/>
-          <a:p>
-            <a:pPr indent="0" lvl="0" marL="0" rtl="0" algn="l">
-              <a:lnSpc>
-                <a:spcPct val="90000"/>
-              </a:lnSpc>
-              <a:spcBef>
-                <a:spcPts val="1000"/>
-              </a:spcBef>
-              <a:spcAft>
-                <a:spcPts val="0"/>
-              </a:spcAft>
-              <a:buSzPts val="1800"/>
-              <a:buNone/>
-              <a:defRPr sz="1300"/>
-            </a:pPr>
-            <a:r>
-              <a:rPr sz="1600"/>
-              <a:t>Methodology:</a:t>
-            </a:r>
-            <a:endParaRPr/>
-          </a:p>
-          <a:p>
-            <a:r>
-              <a:rPr sz="1600"/>
-              <a:t>M1 (T0+2): probes, TankScore, dashboard served from flash.</a:t>
-            </a:r>
-          </a:p>
-          <a:p>
-            <a:r>
-              <a:rPr sz="1600"/>
-              <a:t>H1 + dashboard (T0+4): TFT, pump control, session log, device table.</a:t>
-            </a:r>
-          </a:p>
-          <a:p>
-            <a:r>
-              <a:rPr sz="1600"/>
-              <a:t>C1 (T0+8): 2R arm, planner, controller, three-ring cycle.</a:t>
-            </a:r>
-          </a:p>
-          <a:p>
-            <a:r>
-              <a:rPr sz="1600"/>
-              <a:t>Field (T0+12): three installations, 90 days, TRL 6+ evidence.</a:t>
-            </a:r>
-          </a:p>
-        </p:txBody>
-      </p:sp>
-      <p:sp>
-        <p:nvSpPr>
           <p:cNvPr id="118" name="Google Shape;118;g25ace02ada9_0_17"/>
           <p:cNvSpPr txBox="1"/>
           <p:nvPr/>
@@ -21358,6 +20617,84 @@
               <a:cs typeface="Arial"/>
               <a:sym typeface="Arial"/>
             </a:endParaRPr>
+          </a:p>
+        </p:txBody>
+      </p:sp>
+      <p:sp>
+        <p:nvSpPr>
+          <p:cNvPr id="119" name="TextBox 118"/>
+          <p:cNvSpPr txBox="1"/>
+          <p:nvPr/>
+        </p:nvSpPr>
+        <p:spPr>
+          <a:xfrm>
+            <a:off x="777240" y="1325880"/>
+            <a:ext cx="10607040" cy="4206240"/>
+          </a:xfrm>
+          <a:prstGeom prst="rect">
+            <a:avLst/>
+          </a:prstGeom>
+          <a:noFill/>
+        </p:spPr>
+        <p:txBody>
+          <a:bodyPr wrap="square">
+            <a:spAutoFit/>
+          </a:bodyPr>
+          <a:lstStyle/>
+          <a:p>
+            <a:pPr>
+              <a:spcAft>
+                <a:spcPts val="800"/>
+              </a:spcAft>
+              <a:defRPr sz="1800"/>
+            </a:pPr>
+            <a:r>
+              <a:t>Methodology:</a:t>
+            </a:r>
+          </a:p>
+          <a:p>
+            <a:pPr>
+              <a:spcAft>
+                <a:spcPts val="800"/>
+              </a:spcAft>
+              <a:defRPr sz="1800"/>
+            </a:pPr>
+            <a:r>
+              <a:t>M1 (T0+2): probes, TankScore, dashboard served from flash.</a:t>
+            </a:r>
+          </a:p>
+          <a:p>
+            <a:pPr>
+              <a:spcAft>
+                <a:spcPts val="800"/>
+              </a:spcAft>
+              <a:defRPr sz="1800"/>
+            </a:pPr>
+            <a:r>
+              <a:t>H1 + dashboard (T0+4): TFT, pump control, session log, device table.</a:t>
+            </a:r>
+          </a:p>
+          <a:p>
+            <a:pPr>
+              <a:spcAft>
+                <a:spcPts val="800"/>
+              </a:spcAft>
+              <a:defRPr sz="1800"/>
+            </a:pPr>
+            <a:r>
+              <a:t>C1 (T0+8): 2R arm, planner, controller, three-ring cycle.</a:t>
+            </a:r>
+          </a:p>
+          <a:p>
+            <a:pPr>
+              <a:spcAft>
+                <a:spcPts val="800"/>
+              </a:spcAft>
+              <a:defRPr sz="1800"/>
+            </a:pPr>
+            <a:r>
+              <a:t>Field (T0+12): three installations, 90 days, TRL 6+ evidence.</a:t>
+            </a:r>
           </a:p>
         </p:txBody>
       </p:sp>
@@ -21394,7 +20731,7 @@
         </p:nvGraphicFramePr>
         <p:xfrm>
           <a:off x="751114" y="1471990"/>
-          <a:ext cx="3000000" cy="3000000"/>
+          <a:ext cx="3000000" cy="2514600"/>
         </p:xfrm>
         <a:graphic>
           <a:graphicData uri="http://schemas.openxmlformats.org/drawingml/2006/table">
@@ -21408,37 +20745,15 @@
                 <a:gridCol w="4985250"/>
                 <a:gridCol w="3350400"/>
               </a:tblGrid>
-              <a:tr h="553525">
+              <a:tr h="502920">
                 <a:tc>
                   <a:txBody>
                     <a:bodyPr/>
                     <a:lstStyle/>
                     <a:p>
-                      <a:pPr indent="0" lvl="0" marL="0" marR="0" rtl="0" algn="l">
-                        <a:lnSpc>
-                          <a:spcPct val="100000"/>
-                        </a:lnSpc>
-                        <a:spcBef>
-                          <a:spcPts val="0"/>
-                        </a:spcBef>
-                        <a:spcAft>
-                          <a:spcPts val="0"/>
-                        </a:spcAft>
-                        <a:buClr>
-                          <a:srgbClr val="000000"/>
-                        </a:buClr>
-                        <a:buSzPts val="1100"/>
-                        <a:buFont typeface="Arial"/>
-                        <a:buNone/>
-                      </a:pPr>
                       <a:r>
-                        <a:t/>
+                        <a:t>No.</a:t>
                       </a:r>
-                      <a:endParaRPr sz="1100" u="none" cap="none" strike="noStrike">
-                        <a:solidFill>
-                          <a:schemeClr val="dk1"/>
-                        </a:solidFill>
-                      </a:endParaRPr>
                     </a:p>
                   </a:txBody>
                   <a:tcPr marT="45725" marB="45725" marR="91450" marL="91450"/>
@@ -21448,75 +20763,9 @@
                     <a:bodyPr/>
                     <a:lstStyle/>
                     <a:p>
-                      <a:pPr indent="0" lvl="0" marL="0" marR="0" rtl="0" algn="just">
-                        <a:lnSpc>
-                          <a:spcPct val="100000"/>
-                        </a:lnSpc>
-                        <a:spcBef>
-                          <a:spcPts val="0"/>
-                        </a:spcBef>
-                        <a:spcAft>
-                          <a:spcPts val="0"/>
-                        </a:spcAft>
-                        <a:buClr>
-                          <a:srgbClr val="000000"/>
-                        </a:buClr>
-                        <a:buSzPts val="1100"/>
-                        <a:buFont typeface="Arial"/>
-                        <a:buNone/>
-                      </a:pPr>
                       <a:r>
-                        <a:t/>
+                        <a:t>Milestone</a:t>
                       </a:r>
-                      <a:endParaRPr b="1" sz="1100" u="none" cap="none" strike="noStrike">
-                        <a:solidFill>
-                          <a:schemeClr val="dk1"/>
-                        </a:solidFill>
-                        <a:latin typeface="Arial"/>
-                        <a:ea typeface="Arial"/>
-                        <a:cs typeface="Arial"/>
-                        <a:sym typeface="Arial"/>
-                      </a:endParaRPr>
-                    </a:p>
-                    <a:p>
-                      <a:pPr indent="0" lvl="0" marL="0" marR="0" rtl="0" algn="just">
-                        <a:lnSpc>
-                          <a:spcPct val="100000"/>
-                        </a:lnSpc>
-                        <a:spcBef>
-                          <a:spcPts val="500"/>
-                        </a:spcBef>
-                        <a:spcAft>
-                          <a:spcPts val="0"/>
-                        </a:spcAft>
-                        <a:buClr>
-                          <a:srgbClr val="000000"/>
-                        </a:buClr>
-                        <a:buSzPts val="1100"/>
-                        <a:buFont typeface="Arial"/>
-                        <a:buNone/>
-                      </a:pPr>
-                      <a:r>
-                        <a:rPr b="1" lang="en-US" sz="1100" u="none" cap="none" strike="noStrike">
-                          <a:solidFill>
-                            <a:schemeClr val="dk1"/>
-                          </a:solidFill>
-                          <a:latin typeface="Arial"/>
-                          <a:ea typeface="Arial"/>
-                          <a:cs typeface="Arial"/>
-                          <a:sym typeface="Arial"/>
-                        </a:rPr>
-                        <a:t>Milestone Details</a:t>
-                      </a:r>
-                      <a:endParaRPr sz="1100" u="none" cap="none" strike="noStrike">
-                        <a:solidFill>
-                          <a:schemeClr val="dk1"/>
-                        </a:solidFill>
-                        <a:latin typeface="Times New Roman"/>
-                        <a:ea typeface="Times New Roman"/>
-                        <a:cs typeface="Times New Roman"/>
-                        <a:sym typeface="Times New Roman"/>
-                      </a:endParaRPr>
                     </a:p>
                   </a:txBody>
                   <a:tcPr marT="0" marB="0" marR="68575" marL="68575"/>
@@ -21526,81 +20775,15 @@
                     <a:bodyPr/>
                     <a:lstStyle/>
                     <a:p>
-                      <a:pPr indent="0" lvl="0" marL="0" marR="0" rtl="0" algn="just">
-                        <a:lnSpc>
-                          <a:spcPct val="100000"/>
-                        </a:lnSpc>
-                        <a:spcBef>
-                          <a:spcPts val="0"/>
-                        </a:spcBef>
-                        <a:spcAft>
-                          <a:spcPts val="0"/>
-                        </a:spcAft>
-                        <a:buClr>
-                          <a:srgbClr val="000000"/>
-                        </a:buClr>
-                        <a:buSzPts val="1100"/>
-                        <a:buFont typeface="Arial"/>
-                        <a:buNone/>
-                      </a:pPr>
                       <a:r>
-                        <a:t/>
+                        <a:t>Time period</a:t>
                       </a:r>
-                      <a:endParaRPr b="1" sz="1100" u="none" cap="none" strike="noStrike">
-                        <a:solidFill>
-                          <a:schemeClr val="dk1"/>
-                        </a:solidFill>
-                        <a:latin typeface="Arial"/>
-                        <a:ea typeface="Arial"/>
-                        <a:cs typeface="Arial"/>
-                        <a:sym typeface="Arial"/>
-                      </a:endParaRPr>
-                    </a:p>
-                    <a:p>
-                      <a:pPr indent="0" lvl="0" marL="0" marR="0" rtl="0" algn="just">
-                        <a:lnSpc>
-                          <a:spcPct val="100000"/>
-                        </a:lnSpc>
-                        <a:spcBef>
-                          <a:spcPts val="500"/>
-                        </a:spcBef>
-                        <a:spcAft>
-                          <a:spcPts val="0"/>
-                        </a:spcAft>
-                        <a:buClr>
-                          <a:srgbClr val="000000"/>
-                        </a:buClr>
-                        <a:buSzPts val="1100"/>
-                        <a:buFont typeface="Arial"/>
-                        <a:buNone/>
-                      </a:pPr>
-                      <a:r>
-                        <a:rPr b="1" lang="en-US" sz="1100" u="none" cap="none" strike="noStrike">
-                          <a:solidFill>
-                            <a:schemeClr val="dk1"/>
-                          </a:solidFill>
-                          <a:latin typeface="Arial"/>
-                          <a:ea typeface="Arial"/>
-                          <a:cs typeface="Arial"/>
-                          <a:sym typeface="Arial"/>
-                        </a:rPr>
-                        <a:t>Time Period Required from To (To Being Project Start Date)</a:t>
-                      </a:r>
-                      <a:endParaRPr sz="1100" u="none" cap="none" strike="noStrike">
-                        <a:solidFill>
-                          <a:schemeClr val="dk1"/>
-                        </a:solidFill>
-                        <a:latin typeface="Times New Roman"/>
-                        <a:ea typeface="Times New Roman"/>
-                        <a:cs typeface="Times New Roman"/>
-                        <a:sym typeface="Times New Roman"/>
-                      </a:endParaRPr>
                     </a:p>
                   </a:txBody>
                   <a:tcPr marT="0" marB="0" marR="68575" marL="68575"/>
                 </a:tc>
               </a:tr>
-              <a:tr h="1547125">
+              <a:tr h="502920">
                 <a:tc>
                   <a:txBody>
                     <a:bodyPr/>
@@ -21638,7 +20821,7 @@
                   <a:tcPr marT="45725" marB="45725" marR="91450" marL="91450"/>
                 </a:tc>
               </a:tr>
-              <a:tr h="1131450">
+              <a:tr h="502920">
                 <a:tc>
                   <a:txBody>
                     <a:bodyPr/>
@@ -21676,7 +20859,7 @@
                   <a:tcPr marT="45725" marB="45725" marR="91450" marL="91450"/>
                 </a:tc>
               </a:tr>
-              <a:tr h="892850">
+              <a:tr h="502920">
                 <a:tc>
                   <a:txBody>
                     <a:bodyPr/>
@@ -21714,7 +20897,7 @@
                   <a:tcPr marT="45725" marB="45725" marR="91450" marL="91450"/>
                 </a:tc>
               </a:tr>
-              <a:tr h="641925">
+              <a:tr h="502920">
                 <a:tc>
                   <a:txBody>
                     <a:bodyPr/>
@@ -21800,8 +20983,7 @@
               <a:defRPr sz="1400" b="1"/>
             </a:pPr>
             <a:r>
-              <a:rPr sz="1600"/>
-              <a:t>Milestones:</a:t>
+              <a:t>Milestones</a:t>
             </a:r>
             <a:endParaRPr b="1" i="0" sz="2800" u="none" cap="none" strike="noStrike">
               <a:solidFill>
@@ -21812,30 +20994,6 @@
               <a:cs typeface="Arial"/>
               <a:sym typeface="Arial"/>
             </a:endParaRPr>
-          </a:p>
-          <a:p>
-            <a:r>
-              <a:rPr sz="1600"/>
-              <a:t>1  Requirements and monitor prototype - T0 + 2 months</a:t>
-            </a:r>
-          </a:p>
-          <a:p>
-            <a:r>
-              <a:rPr sz="1600"/>
-              <a:t>2  Home unit and dashboard - T0 + 4 months</a:t>
-            </a:r>
-          </a:p>
-          <a:p>
-            <a:r>
-              <a:rPr sz="1600"/>
-              <a:t>3  Cleaning arm - T0 + 8 months</a:t>
-            </a:r>
-          </a:p>
-          <a:p>
-            <a:r>
-              <a:rPr sz="1600"/>
-              <a:t>4  Field validation - T0 + 12 months</a:t>
-            </a:r>
           </a:p>
         </p:txBody>
       </p:sp>
@@ -21866,103 +21024,6 @@
       </p:grpSpPr>
       <p:sp>
         <p:nvSpPr>
-          <p:cNvPr id="129" name="Google Shape;129;g25ace02ada9_0_28"/>
-          <p:cNvSpPr txBox="1"/>
-          <p:nvPr>
-            <p:ph type="title"/>
-          </p:nvPr>
-        </p:nvSpPr>
-        <p:spPr>
-          <a:xfrm>
-            <a:off x="838200" y="365125"/>
-            <a:ext cx="10515600" cy="1325700"/>
-          </a:xfrm>
-          <a:prstGeom prst="rect">
-            <a:avLst/>
-          </a:prstGeom>
-          <a:noFill/>
-          <a:ln>
-            <a:noFill/>
-          </a:ln>
-        </p:spPr>
-        <p:txBody>
-          <a:bodyPr anchorCtr="0" anchor="ctr" bIns="45700" lIns="91425" spcFirstLastPara="1" rIns="91425" wrap="square" tIns="45700">
-            <a:normAutofit/>
-          </a:bodyPr>
-          <a:lstStyle/>
-          <a:p>
-            <a:pPr indent="0" lvl="0" marL="0" rtl="0" algn="l">
-              <a:lnSpc>
-                <a:spcPct val="90000"/>
-              </a:lnSpc>
-              <a:spcBef>
-                <a:spcPts val="0"/>
-              </a:spcBef>
-              <a:spcAft>
-                <a:spcPts val="0"/>
-              </a:spcAft>
-              <a:buSzPts val="1800"/>
-              <a:buNone/>
-            </a:pPr>
-            <a:r>
-              <a:rPr lang="en-US"/>
-              <a:t> </a:t>
-            </a:r>
-            <a:endParaRPr/>
-          </a:p>
-        </p:txBody>
-      </p:sp>
-      <p:sp>
-        <p:nvSpPr>
-          <p:cNvPr id="130" name="Google Shape;130;g25ace02ada9_0_28"/>
-          <p:cNvSpPr txBox="1"/>
-          <p:nvPr>
-            <p:ph idx="1" type="body"/>
-          </p:nvPr>
-        </p:nvSpPr>
-        <p:spPr>
-          <a:xfrm>
-            <a:off x="723862" y="1205050"/>
-            <a:ext cx="10830000" cy="3896786"/>
-          </a:xfrm>
-          <a:prstGeom prst="rect">
-            <a:avLst/>
-          </a:prstGeom>
-          <a:noFill/>
-          <a:ln>
-            <a:noFill/>
-          </a:ln>
-        </p:spPr>
-        <p:txBody>
-          <a:bodyPr anchorCtr="0" anchor="t" bIns="45700" lIns="91425" spcFirstLastPara="1" rIns="91425" wrap="square" tIns="45700">
-            <a:normAutofit/>
-          </a:bodyPr>
-          <a:lstStyle/>
-          <a:p>
-            <a:pPr indent="0" lvl="0" marL="0" rtl="0" algn="l">
-              <a:lnSpc>
-                <a:spcPct val="90000"/>
-              </a:lnSpc>
-              <a:spcBef>
-                <a:spcPts val="1000"/>
-              </a:spcBef>
-              <a:spcAft>
-                <a:spcPts val="0"/>
-              </a:spcAft>
-              <a:buSzPts val="1800"/>
-              <a:buNone/>
-              <a:defRPr sz="1300"/>
-            </a:pPr>
-            <a:r>
-              <a:rPr sz="1600"/>
-              <a:t>Market: domestic and institutional water storage tanks - homes, apartment buildings, schools, hospitals and small industry. The buyer is the same person who pays the plumber today; the value is water saved, pump life and a measurable answer to "is my water safe?".</a:t>
-            </a:r>
-            <a:endParaRPr/>
-          </a:p>
-        </p:txBody>
-      </p:sp>
-      <p:sp>
-        <p:nvSpPr>
           <p:cNvPr id="131" name="Google Shape;131;g25ace02ada9_0_28"/>
           <p:cNvSpPr txBox="1"/>
           <p:nvPr/>
@@ -22016,6 +21077,40 @@
               <a:cs typeface="Arial"/>
               <a:sym typeface="Arial"/>
             </a:endParaRPr>
+          </a:p>
+        </p:txBody>
+      </p:sp>
+      <p:sp>
+        <p:nvSpPr>
+          <p:cNvPr id="132" name="TextBox 131"/>
+          <p:cNvSpPr txBox="1"/>
+          <p:nvPr/>
+        </p:nvSpPr>
+        <p:spPr>
+          <a:xfrm>
+            <a:off x="777240" y="1325880"/>
+            <a:ext cx="10607040" cy="4206240"/>
+          </a:xfrm>
+          <a:prstGeom prst="rect">
+            <a:avLst/>
+          </a:prstGeom>
+          <a:noFill/>
+        </p:spPr>
+        <p:txBody>
+          <a:bodyPr wrap="square">
+            <a:spAutoFit/>
+          </a:bodyPr>
+          <a:lstStyle/>
+          <a:p>
+            <a:pPr>
+              <a:spcAft>
+                <a:spcPts val="800"/>
+              </a:spcAft>
+              <a:defRPr sz="1800"/>
+            </a:pPr>
+            <a:r>
+              <a:t>Market: domestic and institutional water storage tanks — homes, apartment buildings, schools, hospitals and small industry. The buyer is the same person who pays the plumber today; the value is water saved, pump life and a measurable answer to "is my water safe?"</a:t>
+            </a:r>
           </a:p>
         </p:txBody>
       </p:sp>

--- a/docs/office/TankGuard_Presentation.pptx
+++ b/docs/office/TankGuard_Presentation.pptx
@@ -18894,7 +18894,7 @@
                 <a:spcPct val="100000"/>
               </a:lnSpc>
               <a:spcAft>
-                <a:spcPts val="600"/>
+                <a:spcPts val="400"/>
               </a:spcAft>
             </a:pPr>
             <a:r>
@@ -18904,7 +18904,26 @@
                 </a:solidFill>
                 <a:latin typeface="Calibri"/>
               </a:rPr>
-              <a:t>Dr. Vishnu Vasudev  |  Nuke Labs (industry partner)</a:t>
+              <a:t>Dr. Vishnu Vasudev, Sree Buddha College of Engineering</a:t>
+            </a:r>
+          </a:p>
+          <a:p>
+            <a:pPr algn="ctr">
+              <a:lnSpc>
+                <a:spcPct val="100000"/>
+              </a:lnSpc>
+              <a:spcAft>
+                <a:spcPts val="1200"/>
+              </a:spcAft>
+            </a:pPr>
+            <a:r>
+              <a:rPr sz="1400" b="0" i="0">
+                <a:solidFill>
+                  <a:srgbClr val="595959"/>
+                </a:solidFill>
+                <a:latin typeface="Calibri"/>
+              </a:rPr>
+              <a:t>Industry partner: Nuke Labs</a:t>
             </a:r>
           </a:p>
           <a:p>
@@ -19074,7 +19093,7 @@
                 </a:solidFill>
                 <a:latin typeface="Calibri"/>
               </a:rPr>
-              <a:t>The buyer is the owner who pays for cleaning today.</a:t>
+              <a:t>The buyer is the contractor who already charges for the clean.</a:t>
             </a:r>
           </a:p>
         </p:txBody>
@@ -19208,7 +19227,7 @@
                 </a:solidFill>
                 <a:latin typeface="Calibri"/>
               </a:rPr>
-              <a:t>Each cycle reports turbidity reduction, sediment reduction, score change and estimated mass removed.</a:t>
+              <a:t>A tank clean sells for INR 1,500 to 4,000, so the arm is sold to whoever already charges for it.</a:t>
             </a:r>
           </a:p>
         </p:txBody>
@@ -19296,7 +19315,7 @@
                 </a:solidFill>
                 <a:latin typeface="Calibri"/>
               </a:rPr>
-              <a:t>Water saved</a:t>
+              <a:t>Who buys</a:t>
             </a:r>
           </a:p>
           <a:p>
@@ -19315,7 +19334,7 @@
                 </a:solidFill>
                 <a:latin typeface="Calibri"/>
               </a:rPr>
-              <a:t>A cycle uses the water already in the tank.</a:t>
+              <a:t>Cleaning contractors and facility managers first.</a:t>
             </a:r>
           </a:p>
           <a:p>
@@ -19334,7 +19353,7 @@
                 </a:solidFill>
                 <a:latin typeface="Calibri"/>
               </a:rPr>
-              <a:t>A full drain discards the whole stored volume.</a:t>
+              <a:t>Households reach the product through them.</a:t>
             </a:r>
           </a:p>
         </p:txBody>
@@ -19422,7 +19441,7 @@
                 </a:solidFill>
                 <a:latin typeface="Calibri"/>
               </a:rPr>
-              <a:t>Pump protection</a:t>
+              <a:t>Price target</a:t>
             </a:r>
           </a:p>
           <a:p>
@@ -19441,7 +19460,7 @@
                 </a:solidFill>
                 <a:latin typeface="Calibri"/>
               </a:rPr>
-              <a:t>Level-based control stops the pump running dry.</a:t>
+              <a:t>INR 39,999 for M1, H1 and C1.</a:t>
             </a:r>
           </a:p>
           <a:p>
@@ -19460,7 +19479,7 @@
                 </a:solidFill>
                 <a:latin typeface="Calibri"/>
               </a:rPr>
-              <a:t>The manual override releases safely after ten minutes.</a:t>
+              <a:t>Against INR 15,600 of parts, a 61 percent margin.</a:t>
             </a:r>
           </a:p>
         </p:txBody>
@@ -19548,7 +19567,7 @@
                 </a:solidFill>
                 <a:latin typeface="Calibri"/>
               </a:rPr>
-              <a:t>Early warning</a:t>
+              <a:t>Market base</a:t>
             </a:r>
           </a:p>
           <a:p>
@@ -19567,7 +19586,7 @@
                 </a:solidFill>
                 <a:latin typeface="Calibri"/>
               </a:rPr>
-              <a:t>A falling score shows degradation before smell or taste.</a:t>
+              <a:t>About 47 million urban tanks.</a:t>
             </a:r>
           </a:p>
           <a:p>
@@ -19586,7 +19605,7 @@
                 </a:solidFill>
                 <a:latin typeface="Calibri"/>
               </a:rPr>
-              <a:t>The clean is planned instead of forced.</a:t>
+              <a:t>Plus 1.5 million schools and 70,000 hospitals.</a:t>
             </a:r>
           </a:p>
         </p:txBody>
@@ -19674,7 +19693,7 @@
                 </a:solidFill>
                 <a:latin typeface="Calibri"/>
               </a:rPr>
-              <a:t>Who buys</a:t>
+              <a:t>Water saved</a:t>
             </a:r>
           </a:p>
           <a:p>
@@ -19693,7 +19712,7 @@
                 </a:solidFill>
                 <a:latin typeface="Calibri"/>
               </a:rPr>
-              <a:t>Homes, apartment buildings, schools, hospitals and small industry.</a:t>
+              <a:t>A cycle uses the water already in the tank.</a:t>
             </a:r>
           </a:p>
           <a:p>
@@ -19712,7 +19731,7 @@
                 </a:solidFill>
                 <a:latin typeface="Calibri"/>
               </a:rPr>
-              <a:t>Sold through the cleaning contractors who already visit these sites.</a:t>
+              <a:t>A full drain discards the whole stored volume.</a:t>
             </a:r>
           </a:p>
         </p:txBody>
@@ -19928,7 +19947,7 @@
                 </a:solidFill>
                 <a:latin typeface="Calibri"/>
               </a:rPr>
-              <a:t>Indicative equipment cost is INR 15,600.</a:t>
+              <a:t>The request is INR 42.34 lakh for twelve months.</a:t>
             </a:r>
           </a:p>
         </p:txBody>
@@ -19970,7 +19989,7 @@
                 </a:solidFill>
                 <a:latin typeface="Calibri"/>
               </a:rPr>
-              <a:t>The grand total of INR 23,587 adds contingency, overhead and the faculty fee.</a:t>
+              <a:t>Six cost heads, then the programme's contingency, overhead and faculty fee.</a:t>
             </a:r>
           </a:p>
         </p:txBody>
@@ -19984,8 +20003,8 @@
           <p:nvPr/>
         </p:nvGraphicFramePr>
         <p:xfrm>
-          <a:off x="1417320" y="2395728"/>
-          <a:ext cx="9235439" cy="2971800"/>
+          <a:off x="658368" y="2240280"/>
+          <a:ext cx="5120640" cy="3227832"/>
         </p:xfrm>
         <a:graphic>
           <a:graphicData uri="http://schemas.openxmlformats.org/drawingml/2006/table">
@@ -19994,10 +20013,8 @@
                 <a:tableStyleId>{5C22544A-7EE6-4342-B048-85BDC9FD1C3A}</a:tableStyleId>
               </a:tblPr>
               <a:tblGrid>
-                <a:gridCol w="2468880"/>
-                <a:gridCol w="3749039"/>
-                <a:gridCol w="1554480"/>
-                <a:gridCol w="1463040"/>
+                <a:gridCol w="3017520"/>
+                <a:gridCol w="2103120"/>
               </a:tblGrid>
               <a:tr h="411480">
                 <a:tc>
@@ -20013,30 +20030,7 @@
                           </a:solidFill>
                           <a:latin typeface="Calibri"/>
                         </a:rPr>
-                        <a:t>Item</a:t>
-                      </a:r>
-                    </a:p>
-                  </a:txBody>
-                  <a:tcPr marL="109728" marR="109728" marT="45720" marB="45720" anchor="ctr">
-                    <a:solidFill>
-                      <a:srgbClr val="2E74B5"/>
-                    </a:solidFill>
-                  </a:tcPr>
-                </a:tc>
-                <a:tc>
-                  <a:txBody>
-                    <a:bodyPr/>
-                    <a:lstStyle/>
-                    <a:p>
-                      <a:pPr algn="l"/>
-                      <a:r>
-                        <a:rPr sz="1200" b="1">
-                          <a:solidFill>
-                            <a:srgbClr val="FFFFFF"/>
-                          </a:solidFill>
-                          <a:latin typeface="Calibri"/>
-                        </a:rPr>
-                        <a:t>Specification</a:t>
+                        <a:t>Cost head</a:t>
                       </a:r>
                     </a:p>
                   </a:txBody>
@@ -20069,31 +20063,8 @@
                     </a:solidFill>
                   </a:tcPr>
                 </a:tc>
-                <a:tc>
-                  <a:txBody>
-                    <a:bodyPr/>
-                    <a:lstStyle/>
-                    <a:p>
-                      <a:pPr algn="l"/>
-                      <a:r>
-                        <a:rPr sz="1200" b="1">
-                          <a:solidFill>
-                            <a:srgbClr val="FFFFFF"/>
-                          </a:solidFill>
-                          <a:latin typeface="Calibri"/>
-                        </a:rPr>
-                        <a:t>Phase</a:t>
-                      </a:r>
-                    </a:p>
-                  </a:txBody>
-                  <a:tcPr marL="109728" marR="109728" marT="45720" marB="45720" anchor="ctr">
-                    <a:solidFill>
-                      <a:srgbClr val="2E74B5"/>
-                    </a:solidFill>
-                  </a:tcPr>
-                </a:tc>
               </a:tr>
-              <a:tr h="512064">
+              <a:tr h="402336">
                 <a:tc>
                   <a:txBody>
                     <a:bodyPr/>
@@ -20107,30 +20078,7 @@
                           </a:solidFill>
                           <a:latin typeface="Calibri"/>
                         </a:rPr>
-                        <a:t>M1 monitor</a:t>
-                      </a:r>
-                    </a:p>
-                  </a:txBody>
-                  <a:tcPr marL="109728" marR="109728" marT="45720" marB="45720" anchor="ctr">
-                    <a:solidFill>
-                      <a:srgbClr val="FFFFFF"/>
-                    </a:solidFill>
-                  </a:tcPr>
-                </a:tc>
-                <a:tc>
-                  <a:txBody>
-                    <a:bodyPr/>
-                    <a:lstStyle/>
-                    <a:p>
-                      <a:pPr algn="l"/>
-                      <a:r>
-                        <a:rPr sz="1200" b="0">
-                          <a:solidFill>
-                            <a:srgbClr val="262626"/>
-                          </a:solidFill>
-                          <a:latin typeface="Calibri"/>
-                        </a:rPr>
-                        <a:t>ESP8266, 5 probes, solar</a:t>
+                        <a:t>Manpower</a:t>
                       </a:r>
                     </a:p>
                   </a:txBody>
@@ -20153,7 +20101,7 @@
                           </a:solidFill>
                           <a:latin typeface="Calibri"/>
                         </a:rPr>
-                        <a:t>6,500</a:t>
+                        <a:t>12,00,000</a:t>
                       </a:r>
                     </a:p>
                   </a:txBody>
@@ -20163,6 +20111,8 @@
                     </a:solidFill>
                   </a:tcPr>
                 </a:tc>
+              </a:tr>
+              <a:tr h="402336">
                 <a:tc>
                   <a:txBody>
                     <a:bodyPr/>
@@ -20176,55 +20126,7 @@
                           </a:solidFill>
                           <a:latin typeface="Calibri"/>
                         </a:rPr>
-                        <a:t>T0</a:t>
-                      </a:r>
-                    </a:p>
-                  </a:txBody>
-                  <a:tcPr marL="109728" marR="109728" marT="45720" marB="45720" anchor="ctr">
-                    <a:solidFill>
-                      <a:srgbClr val="FFFFFF"/>
-                    </a:solidFill>
-                  </a:tcPr>
-                </a:tc>
-              </a:tr>
-              <a:tr h="512064">
-                <a:tc>
-                  <a:txBody>
-                    <a:bodyPr/>
-                    <a:lstStyle/>
-                    <a:p>
-                      <a:pPr algn="l"/>
-                      <a:r>
-                        <a:rPr sz="1200" b="0">
-                          <a:solidFill>
-                            <a:srgbClr val="262626"/>
-                          </a:solidFill>
-                          <a:latin typeface="Calibri"/>
-                        </a:rPr>
-                        <a:t>H1 home unit</a:t>
-                      </a:r>
-                    </a:p>
-                  </a:txBody>
-                  <a:tcPr marL="109728" marR="109728" marT="45720" marB="45720" anchor="ctr">
-                    <a:solidFill>
-                      <a:srgbClr val="E9EDF6"/>
-                    </a:solidFill>
-                  </a:tcPr>
-                </a:tc>
-                <a:tc>
-                  <a:txBody>
-                    <a:bodyPr/>
-                    <a:lstStyle/>
-                    <a:p>
-                      <a:pPr algn="l"/>
-                      <a:r>
-                        <a:rPr sz="1200" b="0">
-                          <a:solidFill>
-                            <a:srgbClr val="262626"/>
-                          </a:solidFill>
-                          <a:latin typeface="Calibri"/>
-                        </a:rPr>
-                        <a:t>ESP8266, 1.8 inch display, relay</a:t>
+                        <a:t>Equipment</a:t>
                       </a:r>
                     </a:p>
                   </a:txBody>
@@ -20247,7 +20149,7 @@
                           </a:solidFill>
                           <a:latin typeface="Calibri"/>
                         </a:rPr>
-                        <a:t>1,800</a:t>
+                        <a:t>6,00,000</a:t>
                       </a:r>
                     </a:p>
                   </a:txBody>
@@ -20257,6 +20159,8 @@
                     </a:solidFill>
                   </a:tcPr>
                 </a:tc>
+              </a:tr>
+              <a:tr h="402336">
                 <a:tc>
                   <a:txBody>
                     <a:bodyPr/>
@@ -20270,55 +20174,7 @@
                           </a:solidFill>
                           <a:latin typeface="Calibri"/>
                         </a:rPr>
-                        <a:t>T0 + 4</a:t>
-                      </a:r>
-                    </a:p>
-                  </a:txBody>
-                  <a:tcPr marL="109728" marR="109728" marT="45720" marB="45720" anchor="ctr">
-                    <a:solidFill>
-                      <a:srgbClr val="E9EDF6"/>
-                    </a:solidFill>
-                  </a:tcPr>
-                </a:tc>
-              </a:tr>
-              <a:tr h="512064">
-                <a:tc>
-                  <a:txBody>
-                    <a:bodyPr/>
-                    <a:lstStyle/>
-                    <a:p>
-                      <a:pPr algn="l"/>
-                      <a:r>
-                        <a:rPr sz="1200" b="0">
-                          <a:solidFill>
-                            <a:srgbClr val="262626"/>
-                          </a:solidFill>
-                          <a:latin typeface="Calibri"/>
-                        </a:rPr>
-                        <a:t>C1 cleaning arm</a:t>
-                      </a:r>
-                    </a:p>
-                  </a:txBody>
-                  <a:tcPr marL="109728" marR="109728" marT="45720" marB="45720" anchor="ctr">
-                    <a:solidFill>
-                      <a:srgbClr val="FFFFFF"/>
-                    </a:solidFill>
-                  </a:tcPr>
-                </a:tc>
-                <a:tc>
-                  <a:txBody>
-                    <a:bodyPr/>
-                    <a:lstStyle/>
-                    <a:p>
-                      <a:pPr algn="l"/>
-                      <a:r>
-                        <a:rPr sz="1200" b="0">
-                          <a:solidFill>
-                            <a:srgbClr val="262626"/>
-                          </a:solidFill>
-                          <a:latin typeface="Calibri"/>
-                        </a:rPr>
-                        <a:t>ESP32, 2 gearmotors, pump</a:t>
+                        <a:t>Consumables</a:t>
                       </a:r>
                     </a:p>
                   </a:txBody>
@@ -20341,7 +20197,7 @@
                           </a:solidFill>
                           <a:latin typeface="Calibri"/>
                         </a:rPr>
-                        <a:t>7,300</a:t>
+                        <a:t>3,60,000</a:t>
                       </a:r>
                     </a:p>
                   </a:txBody>
@@ -20351,6 +20207,8 @@
                     </a:solidFill>
                   </a:tcPr>
                 </a:tc>
+              </a:tr>
+              <a:tr h="402336">
                 <a:tc>
                   <a:txBody>
                     <a:bodyPr/>
@@ -20364,47 +20222,8 @@
                           </a:solidFill>
                           <a:latin typeface="Calibri"/>
                         </a:rPr>
-                        <a:t>T0 + 8</a:t>
+                        <a:t>Travel</a:t>
                       </a:r>
-                    </a:p>
-                  </a:txBody>
-                  <a:tcPr marL="109728" marR="109728" marT="45720" marB="45720" anchor="ctr">
-                    <a:solidFill>
-                      <a:srgbClr val="FFFFFF"/>
-                    </a:solidFill>
-                  </a:tcPr>
-                </a:tc>
-              </a:tr>
-              <a:tr h="512064">
-                <a:tc>
-                  <a:txBody>
-                    <a:bodyPr/>
-                    <a:lstStyle/>
-                    <a:p>
-                      <a:pPr algn="l"/>
-                      <a:r>
-                        <a:rPr sz="1200" b="1">
-                          <a:solidFill>
-                            <a:srgbClr val="262626"/>
-                          </a:solidFill>
-                          <a:latin typeface="Calibri"/>
-                        </a:rPr>
-                        <a:t>Equipment total</a:t>
-                      </a:r>
-                    </a:p>
-                  </a:txBody>
-                  <a:tcPr marL="109728" marR="109728" marT="45720" marB="45720" anchor="ctr">
-                    <a:solidFill>
-                      <a:srgbClr val="E9EDF6"/>
-                    </a:solidFill>
-                  </a:tcPr>
-                </a:tc>
-                <a:tc>
-                  <a:txBody>
-                    <a:bodyPr/>
-                    <a:lstStyle/>
-                    <a:p>
-                      <a:pPr algn="l"/>
                     </a:p>
                   </a:txBody>
                   <a:tcPr marL="109728" marR="109728" marT="45720" marB="45720" anchor="ctr">
@@ -20420,13 +20239,86 @@
                     <a:p>
                       <a:pPr algn="r"/>
                       <a:r>
-                        <a:rPr sz="1200" b="1">
+                        <a:rPr sz="1200" b="0">
                           <a:solidFill>
                             <a:srgbClr val="262626"/>
                           </a:solidFill>
                           <a:latin typeface="Calibri"/>
                         </a:rPr>
-                        <a:t>15,600</a:t>
+                        <a:t>2,00,000</a:t>
+                      </a:r>
+                    </a:p>
+                  </a:txBody>
+                  <a:tcPr marL="109728" marR="109728" marT="45720" marB="45720" anchor="ctr">
+                    <a:solidFill>
+                      <a:srgbClr val="E9EDF6"/>
+                    </a:solidFill>
+                  </a:tcPr>
+                </a:tc>
+              </a:tr>
+              <a:tr h="402336">
+                <a:tc>
+                  <a:txBody>
+                    <a:bodyPr/>
+                    <a:lstStyle/>
+                    <a:p>
+                      <a:pPr algn="l"/>
+                      <a:r>
+                        <a:rPr sz="1200" b="0">
+                          <a:solidFill>
+                            <a:srgbClr val="262626"/>
+                          </a:solidFill>
+                          <a:latin typeface="Calibri"/>
+                        </a:rPr>
+                        <a:t>Miscellaneous</a:t>
+                      </a:r>
+                    </a:p>
+                  </a:txBody>
+                  <a:tcPr marL="109728" marR="109728" marT="45720" marB="45720" anchor="ctr">
+                    <a:solidFill>
+                      <a:srgbClr val="FFFFFF"/>
+                    </a:solidFill>
+                  </a:tcPr>
+                </a:tc>
+                <a:tc>
+                  <a:txBody>
+                    <a:bodyPr/>
+                    <a:lstStyle/>
+                    <a:p>
+                      <a:pPr algn="r"/>
+                      <a:r>
+                        <a:rPr sz="1200" b="0">
+                          <a:solidFill>
+                            <a:srgbClr val="262626"/>
+                          </a:solidFill>
+                          <a:latin typeface="Calibri"/>
+                        </a:rPr>
+                        <a:t>4,40,000</a:t>
+                      </a:r>
+                    </a:p>
+                  </a:txBody>
+                  <a:tcPr marL="109728" marR="109728" marT="45720" marB="45720" anchor="ctr">
+                    <a:solidFill>
+                      <a:srgbClr val="FFFFFF"/>
+                    </a:solidFill>
+                  </a:tcPr>
+                </a:tc>
+              </a:tr>
+              <a:tr h="402336">
+                <a:tc>
+                  <a:txBody>
+                    <a:bodyPr/>
+                    <a:lstStyle/>
+                    <a:p>
+                      <a:pPr algn="l"/>
+                      <a:r>
+                        <a:rPr sz="1200" b="0">
+                          <a:solidFill>
+                            <a:srgbClr val="262626"/>
+                          </a:solidFill>
+                          <a:latin typeface="Calibri"/>
+                        </a:rPr>
+                        <a:t>Contingency, overhead, fee</a:t>
                       </a:r>
                     </a:p>
                   </a:txBody>
@@ -20441,7 +20333,16 @@
                     <a:bodyPr/>
                     <a:lstStyle/>
                     <a:p>
-                      <a:pPr algn="l"/>
+                      <a:pPr algn="r"/>
+                      <a:r>
+                        <a:rPr sz="1200" b="0">
+                          <a:solidFill>
+                            <a:srgbClr val="262626"/>
+                          </a:solidFill>
+                          <a:latin typeface="Calibri"/>
+                        </a:rPr>
+                        <a:t>14,33,600</a:t>
+                      </a:r>
                     </a:p>
                   </a:txBody>
                   <a:tcPr marL="109728" marR="109728" marT="45720" marB="45720" anchor="ctr">
@@ -20451,7 +20352,7 @@
                   </a:tcPr>
                 </a:tc>
               </a:tr>
-              <a:tr h="512064">
+              <a:tr h="402336">
                 <a:tc>
                   <a:txBody>
                     <a:bodyPr/>
@@ -20465,30 +20366,7 @@
                           </a:solidFill>
                           <a:latin typeface="Calibri"/>
                         </a:rPr>
-                        <a:t>Grand total</a:t>
-                      </a:r>
-                    </a:p>
-                  </a:txBody>
-                  <a:tcPr marL="109728" marR="109728" marT="45720" marB="45720" anchor="ctr">
-                    <a:solidFill>
-                      <a:srgbClr val="FFFFFF"/>
-                    </a:solidFill>
-                  </a:tcPr>
-                </a:tc>
-                <a:tc>
-                  <a:txBody>
-                    <a:bodyPr/>
-                    <a:lstStyle/>
-                    <a:p>
-                      <a:pPr algn="l"/>
-                      <a:r>
-                        <a:rPr sz="1200" b="1">
-                          <a:solidFill>
-                            <a:srgbClr val="262626"/>
-                          </a:solidFill>
-                          <a:latin typeface="Calibri"/>
-                        </a:rPr>
-                        <a:t>with contingency, overhead and fee</a:t>
+                        <a:t>Total</a:t>
                       </a:r>
                     </a:p>
                   </a:txBody>
@@ -20511,22 +20389,8 @@
                           </a:solidFill>
                           <a:latin typeface="Calibri"/>
                         </a:rPr>
-                        <a:t>23,587</a:t>
+                        <a:t>42,33,600</a:t>
                       </a:r>
-                    </a:p>
-                  </a:txBody>
-                  <a:tcPr marL="109728" marR="109728" marT="45720" marB="45720" anchor="ctr">
-                    <a:solidFill>
-                      <a:srgbClr val="FFFFFF"/>
-                    </a:solidFill>
-                  </a:tcPr>
-                </a:tc>
-                <a:tc>
-                  <a:txBody>
-                    <a:bodyPr/>
-                    <a:lstStyle/>
-                    <a:p>
-                      <a:pPr algn="l"/>
                     </a:p>
                   </a:txBody>
                   <a:tcPr marL="109728" marR="109728" marT="45720" marB="45720" anchor="ctr">
@@ -20548,7 +20412,171 @@
         </p:nvSpPr>
         <p:spPr>
           <a:xfrm>
-            <a:off x="658368" y="5440680"/>
+            <a:off x="5989320" y="2240280"/>
+            <a:ext cx="5486400" cy="3108960"/>
+          </a:xfrm>
+          <a:prstGeom prst="roundRect">
+            <a:avLst>
+              <a:gd name="adj" fmla="val 4500"/>
+            </a:avLst>
+          </a:prstGeom>
+          <a:solidFill>
+            <a:srgbClr val="F4F7FB"/>
+          </a:solidFill>
+          <a:ln w="11430">
+            <a:solidFill>
+              <a:srgbClr val="D3DCE8"/>
+            </a:solidFill>
+          </a:ln>
+          <a:effectLst/>
+        </p:spPr>
+        <p:style>
+          <a:lnRef idx="1">
+            <a:schemeClr val="accent1"/>
+          </a:lnRef>
+          <a:fillRef idx="3">
+            <a:schemeClr val="accent1"/>
+          </a:fillRef>
+          <a:effectRef idx="2">
+            <a:schemeClr val="accent1"/>
+          </a:effectRef>
+          <a:fontRef idx="minor">
+            <a:schemeClr val="lt1"/>
+          </a:fontRef>
+        </p:style>
+        <p:txBody>
+          <a:bodyPr rtlCol="0" anchor="ctr"/>
+          <a:lstStyle/>
+          <a:p/>
+        </p:txBody>
+      </p:sp>
+      <p:sp>
+        <p:nvSpPr>
+          <p:cNvPr id="149" name="TextBox 148"/>
+          <p:cNvSpPr txBox="1"/>
+          <p:nvPr/>
+        </p:nvSpPr>
+        <p:spPr>
+          <a:xfrm>
+            <a:off x="6263640" y="2350008"/>
+            <a:ext cx="4937760" cy="2889504"/>
+          </a:xfrm>
+          <a:prstGeom prst="rect">
+            <a:avLst/>
+          </a:prstGeom>
+          <a:noFill/>
+        </p:spPr>
+        <p:txBody>
+          <a:bodyPr wrap="square" anchor="ctr" lIns="0" rIns="0" tIns="0" bIns="0">
+            <a:spAutoFit/>
+          </a:bodyPr>
+          <a:lstStyle/>
+          <a:p>
+            <a:pPr algn="l">
+              <a:lnSpc>
+                <a:spcPct val="100000"/>
+              </a:lnSpc>
+              <a:spcAft>
+                <a:spcPts val="800"/>
+              </a:spcAft>
+            </a:pPr>
+            <a:r>
+              <a:rPr sz="1500" b="1" i="0">
+                <a:solidFill>
+                  <a:srgbClr val="1F3864"/>
+                </a:solidFill>
+                <a:latin typeface="Calibri"/>
+              </a:rPr>
+              <a:t>What the grant buys</a:t>
+            </a:r>
+          </a:p>
+          <a:p>
+            <a:pPr algn="l">
+              <a:lnSpc>
+                <a:spcPct val="105000"/>
+              </a:lnSpc>
+              <a:spcAft>
+                <a:spcPts val="700"/>
+              </a:spcAft>
+            </a:pPr>
+            <a:r>
+              <a:rPr sz="1350" b="0" i="0">
+                <a:solidFill>
+                  <a:srgbClr val="262626"/>
+                </a:solidFill>
+                <a:latin typeface="Calibri"/>
+              </a:rPr>
+              <a:t>Two engineers for twelve months, one mechanical and one firmware.</a:t>
+            </a:r>
+          </a:p>
+          <a:p>
+            <a:pPr algn="l">
+              <a:lnSpc>
+                <a:spcPct val="105000"/>
+              </a:lnSpc>
+              <a:spcAft>
+                <a:spcPts val="700"/>
+              </a:spcAft>
+            </a:pPr>
+            <a:r>
+              <a:rPr sz="1350" b="0" i="0">
+                <a:solidFill>
+                  <a:srgbClr val="262626"/>
+                </a:solidFill>
+                <a:latin typeface="Calibri"/>
+              </a:rPr>
+              <a:t>Twenty pilot sets, enclosure tooling and a tank test rig.</a:t>
+            </a:r>
+          </a:p>
+          <a:p>
+            <a:pPr algn="l">
+              <a:lnSpc>
+                <a:spcPct val="105000"/>
+              </a:lnSpc>
+              <a:spcAft>
+                <a:spcPts val="700"/>
+              </a:spcAft>
+            </a:pPr>
+            <a:r>
+              <a:rPr sz="1350" b="0" i="0">
+                <a:solidFill>
+                  <a:srgbClr val="262626"/>
+                </a:solidFill>
+                <a:latin typeface="Calibri"/>
+              </a:rPr>
+              <a:t>Certification, a patent filing and twelve field installations.</a:t>
+            </a:r>
+          </a:p>
+          <a:p>
+            <a:pPr algn="l">
+              <a:lnSpc>
+                <a:spcPct val="105000"/>
+              </a:lnSpc>
+              <a:spcAft>
+                <a:spcPts val="700"/>
+              </a:spcAft>
+            </a:pPr>
+            <a:r>
+              <a:rPr sz="1350" b="0" i="0">
+                <a:solidFill>
+                  <a:srgbClr val="262626"/>
+                </a:solidFill>
+                <a:latin typeface="Calibri"/>
+              </a:rPr>
+              <a:t>Market work with two channel partners.</a:t>
+            </a:r>
+          </a:p>
+        </p:txBody>
+      </p:sp>
+      <p:sp>
+        <p:nvSpPr>
+          <p:cNvPr id="150" name="Rounded Rectangle 149"/>
+          <p:cNvSpPr/>
+          <p:nvPr/>
+        </p:nvSpPr>
+        <p:spPr>
+          <a:xfrm>
+            <a:off x="658368" y="5623560"/>
             <a:ext cx="10881360" cy="713232"/>
           </a:xfrm>
           <a:prstGeom prst="roundRect">
@@ -20588,13 +20616,13 @@
       </p:sp>
       <p:sp>
         <p:nvSpPr>
-          <p:cNvPr id="149" name="Rounded Rectangle 148"/>
+          <p:cNvPr id="151" name="Rounded Rectangle 150"/>
           <p:cNvSpPr/>
           <p:nvPr/>
         </p:nvSpPr>
         <p:spPr>
           <a:xfrm>
-            <a:off x="676656" y="5550408"/>
+            <a:off x="676656" y="5733288"/>
             <a:ext cx="54864" cy="493776"/>
           </a:xfrm>
           <a:prstGeom prst="roundRect">
@@ -20634,13 +20662,13 @@
       </p:sp>
       <p:sp>
         <p:nvSpPr>
-          <p:cNvPr id="150" name="TextBox 149"/>
+          <p:cNvPr id="152" name="TextBox 151"/>
           <p:cNvSpPr txBox="1"/>
           <p:nvPr/>
         </p:nvSpPr>
         <p:spPr>
           <a:xfrm>
-            <a:off x="896112" y="5513832"/>
+            <a:off x="896112" y="5696712"/>
             <a:ext cx="10424160" cy="566928"/>
           </a:xfrm>
           <a:prstGeom prst="rect">
@@ -20669,14 +20697,14 @@
                 </a:solidFill>
                 <a:latin typeface="Calibri"/>
               </a:rPr>
-              <a:t>Figures are vendor quotes pending confirmation. Manpower, travel and consumables are agreed at the grant kickoff.</a:t>
+              <a:t>Prototype spend to date is INR 23,587, already invested. This request funds the product, not the prototype.</a:t>
             </a:r>
           </a:p>
         </p:txBody>
       </p:sp>
       <p:sp>
         <p:nvSpPr>
-          <p:cNvPr id="151" name="TextBox 150"/>
+          <p:cNvPr id="153" name="TextBox 152"/>
           <p:cNvSpPr txBox="1"/>
           <p:nvPr/>
         </p:nvSpPr>
@@ -20718,7 +20746,7 @@
       </p:sp>
       <p:sp>
         <p:nvSpPr>
-          <p:cNvPr id="152" name="TextBox 151"/>
+          <p:cNvPr id="154" name="TextBox 153"/>
           <p:cNvSpPr txBox="1"/>
           <p:nvPr/>
         </p:nvSpPr>
@@ -20885,7 +20913,7 @@
                 </a:solidFill>
                 <a:latin typeface="Calibri"/>
               </a:rPr>
-              <a:t>Funding status, and what the grant pays for.</a:t>
+              <a:t>INR 42.34 lakh turns the prototype into a product.</a:t>
             </a:r>
           </a:p>
         </p:txBody>
@@ -21019,7 +21047,7 @@
                 </a:solidFill>
                 <a:latin typeface="Calibri"/>
               </a:rPr>
-              <a:t>The grant covers the monitor, the home unit, the cleaning arm and the field evidence pack.</a:t>
+              <a:t>The grant pays for tooling, certification, pilot units and two engineers, which a first customer will not fund.</a:t>
             </a:r>
           </a:p>
         </p:txBody>
@@ -21126,7 +21154,7 @@
                 </a:solidFill>
                 <a:latin typeface="Calibri"/>
               </a:rPr>
-              <a:t>INR 23,587 over twelve months.</a:t>
+              <a:t>INR 42,33,600 over twelve months.</a:t>
             </a:r>
           </a:p>
           <a:p>
@@ -21145,7 +21173,7 @@
                 </a:solidFill>
                 <a:latin typeface="Calibri"/>
               </a:rPr>
-              <a:t>Equipment is INR 15,600 of that total.</a:t>
+              <a:t>That is 85 percent of the programme ceiling.</a:t>
             </a:r>
           </a:p>
         </p:txBody>
@@ -21233,7 +21261,7 @@
                 </a:solidFill>
                 <a:latin typeface="Calibri"/>
               </a:rPr>
-              <a:t>Released in tranches</a:t>
+              <a:t>Already invested</a:t>
             </a:r>
           </a:p>
           <a:p>
@@ -21252,7 +21280,7 @@
                 </a:solidFill>
                 <a:latin typeface="Calibri"/>
               </a:rPr>
-              <a:t>8,235 at T0, 9,415 at T0 + 6 months, 5,937 at T0 + 12 months.</a:t>
+              <a:t>INR 23,587 of prototype parts.</a:t>
             </a:r>
           </a:p>
           <a:p>
@@ -21271,7 +21299,7 @@
                 </a:solidFill>
                 <a:latin typeface="Calibri"/>
               </a:rPr>
-              <a:t>80 percent of each tranche is spent before the next is claimed.</a:t>
+              <a:t>The monitor, dashboard and planner already run.</a:t>
             </a:r>
           </a:p>
         </p:txBody>
@@ -21359,7 +21387,7 @@
                 </a:solidFill>
                 <a:latin typeface="Calibri"/>
               </a:rPr>
-              <a:t>Industry partner</a:t>
+              <a:t>Released in tranches</a:t>
             </a:r>
           </a:p>
           <a:p>
@@ -21378,7 +21406,7 @@
                 </a:solidFill>
                 <a:latin typeface="Calibri"/>
               </a:rPr>
-              <a:t>Nuke Labs provides build facilities, field access and validation.</a:t>
+              <a:t>15.33 lakh at T0, 16.84 lakh at month 6, 10.16 lakh at month 12.</a:t>
             </a:r>
           </a:p>
           <a:p>
@@ -21397,7 +21425,7 @@
                 </a:solidFill>
                 <a:latin typeface="Calibri"/>
               </a:rPr>
-              <a:t>The partner also carries the commercialisation path.</a:t>
+              <a:t>80 percent of each tranche is spent before the next is claimed.</a:t>
             </a:r>
           </a:p>
         </p:txBody>
@@ -21485,7 +21513,7 @@
                 </a:solidFill>
                 <a:latin typeface="Calibri"/>
               </a:rPr>
-              <a:t>Status</a:t>
+              <a:t>Partner</a:t>
             </a:r>
           </a:p>
           <a:p>
@@ -21504,7 +21532,7 @@
                 </a:solidFill>
                 <a:latin typeface="Calibri"/>
               </a:rPr>
-              <a:t>No funding secured yet.</a:t>
+              <a:t>Nuke Labs provides build facilities, field access and the service channel.</a:t>
             </a:r>
           </a:p>
           <a:p>
@@ -21523,7 +21551,7 @@
                 </a:solidFill>
                 <a:latin typeface="Calibri"/>
               </a:rPr>
-              <a:t>This proposal is the first formal request.</a:t>
+              <a:t>The partner carries the commercialisation path.</a:t>
             </a:r>
           </a:p>
         </p:txBody>
@@ -21739,7 +21767,7 @@
                 </a:solidFill>
                 <a:latin typeface="Calibri"/>
               </a:rPr>
-              <a:t>One team, twelve months, a working system at TRL 6.</a:t>
+              <a:t>A working monitor today. A certified system in twelve months.</a:t>
             </a:r>
           </a:p>
         </p:txBody>
@@ -21840,13 +21868,13 @@
               </a:spcAft>
             </a:pPr>
             <a:r>
-              <a:rPr sz="1300" b="0" i="0">
+              <a:rPr sz="1250" b="0" i="0">
                 <a:solidFill>
                   <a:srgbClr val="262626"/>
                 </a:solidFill>
                 <a:latin typeface="Calibri"/>
               </a:rPr>
-              <a:t>Principal Investigator: Dr. Vishnu Vasudev, Department of Electronics and Communication Engineering.</a:t>
+              <a:t>Principal Investigator: Dr. Vishnu Vasudev, Sree Buddha College of Engineering, Department of Electronics and Communication Engineering.</a:t>
             </a:r>
           </a:p>
           <a:p>
@@ -21859,13 +21887,13 @@
               </a:spcAft>
             </a:pPr>
             <a:r>
-              <a:rPr sz="1300" b="0" i="0">
+              <a:rPr sz="1250" b="0" i="0">
                 <a:solidFill>
                   <a:srgbClr val="262626"/>
                 </a:solidFill>
                 <a:latin typeface="Calibri"/>
               </a:rPr>
-              <a:t>Industry partner: Nuke Labs, for hardware build, field installations and commercialisation.</a:t>
+              <a:t>Industry partner: Nuke Labs, for hardware build, field access and the service channel.</a:t>
             </a:r>
           </a:p>
         </p:txBody>
@@ -21966,13 +21994,13 @@
               </a:spcAft>
             </a:pPr>
             <a:r>
-              <a:rPr sz="1300" b="0" i="0">
+              <a:rPr sz="1250" b="0" i="0">
                 <a:solidFill>
                   <a:srgbClr val="262626"/>
                 </a:solidFill>
                 <a:latin typeface="Calibri"/>
               </a:rPr>
-              <a:t>M1 and H1 running in the field, with the dashboard served by the tank unit.</a:t>
+              <a:t>Twenty pilot units and twelve installations in three cities.</a:t>
             </a:r>
           </a:p>
           <a:p>
@@ -21985,13 +22013,13 @@
               </a:spcAft>
             </a:pPr>
             <a:r>
-              <a:rPr sz="1300" b="0" i="0">
+              <a:rPr sz="1250" b="0" i="0">
                 <a:solidFill>
                   <a:srgbClr val="262626"/>
                 </a:solidFill>
                 <a:latin typeface="Calibri"/>
               </a:rPr>
-              <a:t>The C1 arm and its planner, with the coverage limit stated.</a:t>
+              <a:t>Certification and a patent filed, with the unit cost proven.</a:t>
             </a:r>
           </a:p>
           <a:p>
@@ -22004,13 +22032,13 @@
               </a:spcAft>
             </a:pPr>
             <a:r>
-              <a:rPr sz="1300" b="0" i="0">
+              <a:rPr sz="1250" b="0" i="0">
                 <a:solidFill>
                   <a:srgbClr val="262626"/>
                 </a:solidFill>
                 <a:latin typeface="Calibri"/>
               </a:rPr>
-              <a:t>Three installations and 90 days of evidence at TRL 6.</a:t>
+              <a:t>Three paying pilot customers and a signed channel agreement.</a:t>
             </a:r>
           </a:p>
         </p:txBody>
@@ -26781,7 +26809,7 @@
                 </a:solidFill>
                 <a:latin typeface="Calibri"/>
               </a:rPr>
-              <a:t>The monitor, the dashboard and the planner already run.</a:t>
+              <a:t>The monitoring prototype is built and runs at TRL 6.</a:t>
             </a:r>
           </a:p>
         </p:txBody>
@@ -26915,7 +26943,7 @@
                 </a:solidFill>
                 <a:latin typeface="Calibri"/>
               </a:rPr>
-              <a:t>What remains is the arm hardware, the home unit build and twelve months of field validation.</a:t>
+              <a:t>INR 23,587 of prototype parts, already invested. The grant funds the arm hardware, the home unit build and certification.</a:t>
             </a:r>
           </a:p>
         </p:txBody>
@@ -28475,7 +28503,7 @@
                 </a:solidFill>
                 <a:latin typeface="Calibri"/>
               </a:rPr>
-              <a:t>Four gates in twelve months, each one a demonstration.</a:t>
+              <a:t>Four gates in twelve months, each one a commercial step.</a:t>
             </a:r>
           </a:p>
         </p:txBody>
@@ -28517,7 +28545,7 @@
                 </a:solidFill>
                 <a:latin typeface="Calibri"/>
               </a:rPr>
-              <a:t>Every gate produces something that can be shown and measured.</a:t>
+              <a:t>The prototype is the starting point. Each gate moves it closer to a sellable unit.</a:t>
             </a:r>
           </a:p>
         </p:txBody>
@@ -28677,7 +28705,7 @@
                           </a:solidFill>
                           <a:latin typeface="Calibri"/>
                         </a:rPr>
-                        <a:t>Requirements and monitor prototype</a:t>
+                        <a:t>Design freeze and tooling</a:t>
                       </a:r>
                     </a:p>
                   </a:txBody>
@@ -28700,7 +28728,7 @@
                           </a:solidFill>
                           <a:latin typeface="Calibri"/>
                         </a:rPr>
-                        <a:t>T0 + 2 months</a:t>
+                        <a:t>T0 + 3 months</a:t>
                       </a:r>
                     </a:p>
                   </a:txBody>
@@ -28723,7 +28751,7 @@
                           </a:solidFill>
                           <a:latin typeface="Calibri"/>
                         </a:rPr>
-                        <a:t>M1 calibrated, score validated, dashboard served from flash</a:t>
+                        <a:t>Moulds ordered, five pilot sets built, certification scope agreed</a:t>
                       </a:r>
                     </a:p>
                   </a:txBody>
@@ -28771,7 +28799,7 @@
                           </a:solidFill>
                           <a:latin typeface="Calibri"/>
                         </a:rPr>
-                        <a:t>Home unit and dashboard</a:t>
+                        <a:t>Pilot build and lab qualification</a:t>
                       </a:r>
                     </a:p>
                   </a:txBody>
@@ -28794,7 +28822,7 @@
                           </a:solidFill>
                           <a:latin typeface="Calibri"/>
                         </a:rPr>
-                        <a:t>T0 + 4 months</a:t>
+                        <a:t>T0 + 6 months</a:t>
                       </a:r>
                     </a:p>
                   </a:txBody>
@@ -28817,7 +28845,7 @@
                           </a:solidFill>
                           <a:latin typeface="Calibri"/>
                         </a:rPr>
-                        <a:t>H1 pump control, session log and device table complete</a:t>
+                        <a:t>20 sets, IP68 and EMC passed, unit cost confirmed</a:t>
                       </a:r>
                     </a:p>
                   </a:txBody>
@@ -28865,7 +28893,7 @@
                           </a:solidFill>
                           <a:latin typeface="Calibri"/>
                         </a:rPr>
-                        <a:t>Cleaning arm</a:t>
+                        <a:t>Field deployment</a:t>
                       </a:r>
                     </a:p>
                   </a:txBody>
@@ -28888,7 +28916,7 @@
                           </a:solidFill>
                           <a:latin typeface="Calibri"/>
                         </a:rPr>
-                        <a:t>T0 + 8 months</a:t>
+                        <a:t>T0 + 9 months</a:t>
                       </a:r>
                     </a:p>
                   </a:txBody>
@@ -28911,7 +28939,7 @@
                           </a:solidFill>
                           <a:latin typeface="Calibri"/>
                         </a:rPr>
-                        <a:t>C1 built, three-ring cycle run, coverage measured</a:t>
+                        <a:t>12 sites in 3 cities, 60 days of operation</a:t>
                       </a:r>
                     </a:p>
                   </a:txBody>
@@ -28959,7 +28987,7 @@
                           </a:solidFill>
                           <a:latin typeface="Calibri"/>
                         </a:rPr>
-                        <a:t>Field validation</a:t>
+                        <a:t>Commercial readiness</a:t>
                       </a:r>
                     </a:p>
                   </a:txBody>
@@ -29005,7 +29033,7 @@
                           </a:solidFill>
                           <a:latin typeface="Calibri"/>
                         </a:rPr>
-                        <a:t>Three sites, 90 days of data, TRL 6 evidence pack</a:t>
+                        <a:t>Certification and patent filed, 3 paying pilots, TRL 8</a:t>
                       </a:r>
                     </a:p>
                   </a:txBody>
@@ -29149,7 +29177,7 @@
                 </a:solidFill>
                 <a:latin typeface="Calibri"/>
               </a:rPr>
-              <a:t>The field phase closes with a published measurement of score accuracy, cleaning coverage and water saved against a full drain.</a:t>
+              <a:t>The last gate is a sale: three paying customers and a signed channel agreement, with the unit cost proven.</a:t>
             </a:r>
           </a:p>
         </p:txBody>

--- a/docs/office/TankGuard_Presentation.pptx
+++ b/docs/office/TankGuard_Presentation.pptx
@@ -19947,7 +19947,7 @@
                 </a:solidFill>
                 <a:latin typeface="Calibri"/>
               </a:rPr>
-              <a:t>The request is INR 42.34 lakh for twelve months.</a:t>
+              <a:t>The request is INR 42.31 lakh for twelve months.</a:t>
             </a:r>
           </a:p>
         </p:txBody>
@@ -20149,7 +20149,7 @@
                           </a:solidFill>
                           <a:latin typeface="Calibri"/>
                         </a:rPr>
-                        <a:t>6,00,000</a:t>
+                        <a:t>8,40,000</a:t>
                       </a:r>
                     </a:p>
                   </a:txBody>
@@ -20197,7 +20197,7 @@
                           </a:solidFill>
                           <a:latin typeface="Calibri"/>
                         </a:rPr>
-                        <a:t>3,60,000</a:t>
+                        <a:t>4,40,000</a:t>
                       </a:r>
                     </a:p>
                   </a:txBody>
@@ -20341,7 +20341,7 @@
                           </a:solidFill>
                           <a:latin typeface="Calibri"/>
                         </a:rPr>
-                        <a:t>14,33,600</a:t>
+                        <a:t>11,11,200</a:t>
                       </a:r>
                     </a:p>
                   </a:txBody>
@@ -20389,7 +20389,7 @@
                           </a:solidFill>
                           <a:latin typeface="Calibri"/>
                         </a:rPr>
-                        <a:t>42,33,600</a:t>
+                        <a:t>42,31,200</a:t>
                       </a:r>
                     </a:p>
                   </a:txBody>
@@ -20500,7 +20500,7 @@
               </a:spcAft>
             </a:pPr>
             <a:r>
-              <a:rPr sz="1350" b="0" i="0">
+              <a:rPr sz="1300" b="0" i="0">
                 <a:solidFill>
                   <a:srgbClr val="262626"/>
                 </a:solidFill>
@@ -20519,13 +20519,13 @@
               </a:spcAft>
             </a:pPr>
             <a:r>
-              <a:rPr sz="1350" b="0" i="0">
+              <a:rPr sz="1300" b="0" i="0">
                 <a:solidFill>
                   <a:srgbClr val="262626"/>
                 </a:solidFill>
                 <a:latin typeface="Calibri"/>
               </a:rPr>
-              <a:t>Twenty pilot sets, enclosure tooling and a tank test rig.</a:t>
+              <a:t>Twenty-five pilot sets, enclosure tooling and a test rig.</a:t>
             </a:r>
           </a:p>
           <a:p>
@@ -20538,7 +20538,26 @@
               </a:spcAft>
             </a:pPr>
             <a:r>
-              <a:rPr sz="1350" b="0" i="0">
+              <a:rPr sz="1300" b="0" i="0">
+                <a:solidFill>
+                  <a:srgbClr val="262626"/>
+                </a:solidFill>
+                <a:latin typeface="Calibri"/>
+              </a:rPr>
+              <a:t>Reference instruments for the R&amp;D bench.</a:t>
+            </a:r>
+          </a:p>
+          <a:p>
+            <a:pPr algn="l">
+              <a:lnSpc>
+                <a:spcPct val="105000"/>
+              </a:lnSpc>
+              <a:spcAft>
+                <a:spcPts val="700"/>
+              </a:spcAft>
+            </a:pPr>
+            <a:r>
+              <a:rPr sz="1300" b="0" i="0">
                 <a:solidFill>
                   <a:srgbClr val="262626"/>
                 </a:solidFill>
@@ -20557,7 +20576,7 @@
               </a:spcAft>
             </a:pPr>
             <a:r>
-              <a:rPr sz="1350" b="0" i="0">
+              <a:rPr sz="1300" b="0" i="0">
                 <a:solidFill>
                   <a:srgbClr val="262626"/>
                 </a:solidFill>
@@ -20913,7 +20932,7 @@
                 </a:solidFill>
                 <a:latin typeface="Calibri"/>
               </a:rPr>
-              <a:t>INR 42.34 lakh turns the prototype into a product.</a:t>
+              <a:t>INR 42.31 lakh turns the prototype into a product.</a:t>
             </a:r>
           </a:p>
         </p:txBody>
@@ -21154,7 +21173,7 @@
                 </a:solidFill>
                 <a:latin typeface="Calibri"/>
               </a:rPr>
-              <a:t>INR 42,33,600 over twelve months.</a:t>
+              <a:t>INR 42,31,200 over twelve months.</a:t>
             </a:r>
           </a:p>
           <a:p>
@@ -21406,7 +21425,7 @@
                 </a:solidFill>
                 <a:latin typeface="Calibri"/>
               </a:rPr>
-              <a:t>15.33 lakh at T0, 16.84 lakh at month 6, 10.16 lakh at month 12.</a:t>
+              <a:t>15.69 lakh at T0, 16.40 lakh at month 6, 10.22 lakh at month 12.</a:t>
             </a:r>
           </a:p>
           <a:p>
@@ -22000,7 +22019,7 @@
                 </a:solidFill>
                 <a:latin typeface="Calibri"/>
               </a:rPr>
-              <a:t>Twenty pilot units and twelve installations in three cities.</a:t>
+              <a:t>Twenty-five pilot units and twelve installations in three cities.</a:t>
             </a:r>
           </a:p>
           <a:p>
@@ -28845,7 +28864,7 @@
                           </a:solidFill>
                           <a:latin typeface="Calibri"/>
                         </a:rPr>
-                        <a:t>20 sets, IP68 and EMC passed, unit cost confirmed</a:t>
+                        <a:t>25 sets, IP68 and EMC passed, unit cost confirmed</a:t>
                       </a:r>
                     </a:p>
                   </a:txBody>

--- a/docs/office/TankGuard_Presentation.pptx
+++ b/docs/office/TankGuard_Presentation.pptx
@@ -20506,7 +20506,7 @@
                 </a:solidFill>
                 <a:latin typeface="Calibri"/>
               </a:rPr>
-              <a:t>Two engineers for twelve months, one mechanical and one firmware.</a:t>
+              <a:t>Two Nuke Labs engineers for twelve months.</a:t>
             </a:r>
           </a:p>
           <a:p>
@@ -20544,7 +20544,7 @@
                 </a:solidFill>
                 <a:latin typeface="Calibri"/>
               </a:rPr>
-              <a:t>Reference instruments for the R&amp;D bench.</a:t>
+              <a:t>Reference instruments for the validation bench.</a:t>
             </a:r>
           </a:p>
           <a:p>

--- a/docs/office/TankGuard_Presentation.pptx
+++ b/docs/office/TankGuard_Presentation.pptx
@@ -18961,11 +18961,35 @@
                 </a:solidFill>
                 <a:latin typeface="Calibri"/>
               </a:rPr>
-              <a:t>Submission: 31 October 2026</a:t>
+              <a:t>Theme: Water Management   |   Submission: 31 October 2026</a:t>
             </a:r>
           </a:p>
         </p:txBody>
       </p:sp>
+      <p:pic>
+        <p:nvPicPr>
+          <p:cNvPr id="83" name="Picture 82" descr="iitb.png"/>
+          <p:cNvPicPr>
+            <a:picLocks noChangeAspect="1"/>
+          </p:cNvPicPr>
+          <p:nvPr/>
+        </p:nvPicPr>
+        <p:blipFill>
+          <a:blip r:embed="rId3"/>
+          <a:stretch>
+            <a:fillRect/>
+          </a:stretch>
+        </p:blipFill>
+        <p:spPr>
+          <a:xfrm>
+            <a:off x="10561320" y="5806440"/>
+            <a:ext cx="960120" cy="765036"/>
+          </a:xfrm>
+          <a:prstGeom prst="rect">
+            <a:avLst/>
+          </a:prstGeom>
+        </p:spPr>
+      </p:pic>
     </p:spTree>
   </p:cSld>
   <p:clrMapOvr>
@@ -19989,7 +20013,7 @@
                 </a:solidFill>
                 <a:latin typeface="Calibri"/>
               </a:rPr>
-              <a:t>Six cost heads, then the programme's contingency, overhead and faculty fee.</a:t>
+              <a:t>Six cost heads, then contingency, overhead and the faculty fee. All figures include GST.</a:t>
             </a:r>
           </a:p>
         </p:txBody>
@@ -20053,7 +20077,7 @@
                           </a:solidFill>
                           <a:latin typeface="Calibri"/>
                         </a:rPr>
-                        <a:t>Amount (INR)</a:t>
+                        <a:t>Amount (INR, incl. GST)</a:t>
                       </a:r>
                     </a:p>
                   </a:txBody>
@@ -21173,7 +21197,7 @@
                 </a:solidFill>
                 <a:latin typeface="Calibri"/>
               </a:rPr>
-              <a:t>INR 42,31,200 over twelve months.</a:t>
+              <a:t>INR 42,31,200 over twelve months, inclusive of GST.</a:t>
             </a:r>
           </a:p>
           <a:p>

--- a/docs/office/TankGuard_Presentation.pptx
+++ b/docs/office/TankGuard_Presentation.pptx
@@ -19971,7 +19971,7 @@
                 </a:solidFill>
                 <a:latin typeface="Calibri"/>
               </a:rPr>
-              <a:t>The request is INR 42.31 lakh for twelve months.</a:t>
+              <a:t>The request is INR 47.03 lakh for twelve months.</a:t>
             </a:r>
           </a:p>
         </p:txBody>
@@ -20013,7 +20013,7 @@
                 </a:solidFill>
                 <a:latin typeface="Calibri"/>
               </a:rPr>
-              <a:t>Six cost heads, then contingency, overhead and the faculty fee. All figures include GST.</a:t>
+              <a:t>The pilot line, two engineers, the pilot units and the field work. GST is on the total.</a:t>
             </a:r>
           </a:p>
         </p:txBody>
@@ -20028,7 +20028,7 @@
         </p:nvGraphicFramePr>
         <p:xfrm>
           <a:off x="658368" y="2240280"/>
-          <a:ext cx="5120640" cy="3227832"/>
+          <a:ext cx="5120640" cy="3154680"/>
         </p:xfrm>
         <a:graphic>
           <a:graphicData uri="http://schemas.openxmlformats.org/drawingml/2006/table">
@@ -20077,7 +20077,7 @@
                           </a:solidFill>
                           <a:latin typeface="Calibri"/>
                         </a:rPr>
-                        <a:t>Amount (INR, incl. GST)</a:t>
+                        <a:t>Amount (INR)</a:t>
                       </a:r>
                     </a:p>
                   </a:txBody>
@@ -20088,7 +20088,7 @@
                   </a:tcPr>
                 </a:tc>
               </a:tr>
-              <a:tr h="402336">
+              <a:tr h="457200">
                 <a:tc>
                   <a:txBody>
                     <a:bodyPr/>
@@ -20102,7 +20102,7 @@
                           </a:solidFill>
                           <a:latin typeface="Calibri"/>
                         </a:rPr>
-                        <a:t>Manpower</a:t>
+                        <a:t>Equipment (pilot line)</a:t>
                       </a:r>
                     </a:p>
                   </a:txBody>
@@ -20125,7 +20125,7 @@
                           </a:solidFill>
                           <a:latin typeface="Calibri"/>
                         </a:rPr>
-                        <a:t>12,00,000</a:t>
+                        <a:t>24,27,288</a:t>
                       </a:r>
                     </a:p>
                   </a:txBody>
@@ -20136,7 +20136,7 @@
                   </a:tcPr>
                 </a:tc>
               </a:tr>
-              <a:tr h="402336">
+              <a:tr h="457200">
                 <a:tc>
                   <a:txBody>
                     <a:bodyPr/>
@@ -20150,7 +20150,7 @@
                           </a:solidFill>
                           <a:latin typeface="Calibri"/>
                         </a:rPr>
-                        <a:t>Equipment</a:t>
+                        <a:t>Manpower</a:t>
                       </a:r>
                     </a:p>
                   </a:txBody>
@@ -20173,7 +20173,7 @@
                           </a:solidFill>
                           <a:latin typeface="Calibri"/>
                         </a:rPr>
-                        <a:t>8,40,000</a:t>
+                        <a:t>7,20,000</a:t>
                       </a:r>
                     </a:p>
                   </a:txBody>
@@ -20184,7 +20184,7 @@
                   </a:tcPr>
                 </a:tc>
               </a:tr>
-              <a:tr h="402336">
+              <a:tr h="457200">
                 <a:tc>
                   <a:txBody>
                     <a:bodyPr/>
@@ -20221,7 +20221,7 @@
                           </a:solidFill>
                           <a:latin typeface="Calibri"/>
                         </a:rPr>
-                        <a:t>4,40,000</a:t>
+                        <a:t>3,40,000</a:t>
                       </a:r>
                     </a:p>
                   </a:txBody>
@@ -20232,7 +20232,7 @@
                   </a:tcPr>
                 </a:tc>
               </a:tr>
-              <a:tr h="402336">
+              <a:tr h="457200">
                 <a:tc>
                   <a:txBody>
                     <a:bodyPr/>
@@ -20246,7 +20246,7 @@
                           </a:solidFill>
                           <a:latin typeface="Calibri"/>
                         </a:rPr>
-                        <a:t>Travel</a:t>
+                        <a:t>Travel and misc</a:t>
                       </a:r>
                     </a:p>
                   </a:txBody>
@@ -20269,7 +20269,7 @@
                           </a:solidFill>
                           <a:latin typeface="Calibri"/>
                         </a:rPr>
-                        <a:t>2,00,000</a:t>
+                        <a:t>1,17,966</a:t>
                       </a:r>
                     </a:p>
                   </a:txBody>
@@ -20280,7 +20280,7 @@
                   </a:tcPr>
                 </a:tc>
               </a:tr>
-              <a:tr h="402336">
+              <a:tr h="457200">
                 <a:tc>
                   <a:txBody>
                     <a:bodyPr/>
@@ -20294,7 +20294,7 @@
                           </a:solidFill>
                           <a:latin typeface="Calibri"/>
                         </a:rPr>
-                        <a:t>Miscellaneous</a:t>
+                        <a:t>Contingency, faculty, GST</a:t>
                       </a:r>
                     </a:p>
                   </a:txBody>
@@ -20317,7 +20317,7 @@
                           </a:solidFill>
                           <a:latin typeface="Calibri"/>
                         </a:rPr>
-                        <a:t>4,40,000</a:t>
+                        <a:t>10,97,656</a:t>
                       </a:r>
                     </a:p>
                   </a:txBody>
@@ -20328,55 +20328,7 @@
                   </a:tcPr>
                 </a:tc>
               </a:tr>
-              <a:tr h="402336">
-                <a:tc>
-                  <a:txBody>
-                    <a:bodyPr/>
-                    <a:lstStyle/>
-                    <a:p>
-                      <a:pPr algn="l"/>
-                      <a:r>
-                        <a:rPr sz="1200" b="0">
-                          <a:solidFill>
-                            <a:srgbClr val="262626"/>
-                          </a:solidFill>
-                          <a:latin typeface="Calibri"/>
-                        </a:rPr>
-                        <a:t>Contingency, overhead, fee</a:t>
-                      </a:r>
-                    </a:p>
-                  </a:txBody>
-                  <a:tcPr marL="109728" marR="109728" marT="45720" marB="45720" anchor="ctr">
-                    <a:solidFill>
-                      <a:srgbClr val="E9EDF6"/>
-                    </a:solidFill>
-                  </a:tcPr>
-                </a:tc>
-                <a:tc>
-                  <a:txBody>
-                    <a:bodyPr/>
-                    <a:lstStyle/>
-                    <a:p>
-                      <a:pPr algn="r"/>
-                      <a:r>
-                        <a:rPr sz="1200" b="0">
-                          <a:solidFill>
-                            <a:srgbClr val="262626"/>
-                          </a:solidFill>
-                          <a:latin typeface="Calibri"/>
-                        </a:rPr>
-                        <a:t>11,11,200</a:t>
-                      </a:r>
-                    </a:p>
-                  </a:txBody>
-                  <a:tcPr marL="109728" marR="109728" marT="45720" marB="45720" anchor="ctr">
-                    <a:solidFill>
-                      <a:srgbClr val="E9EDF6"/>
-                    </a:solidFill>
-                  </a:tcPr>
-                </a:tc>
-              </a:tr>
-              <a:tr h="402336">
+              <a:tr h="457200">
                 <a:tc>
                   <a:txBody>
                     <a:bodyPr/>
@@ -20396,7 +20348,7 @@
                   </a:txBody>
                   <a:tcPr marL="109728" marR="109728" marT="45720" marB="45720" anchor="ctr">
                     <a:solidFill>
-                      <a:srgbClr val="FFFFFF"/>
+                      <a:srgbClr val="E9EDF6"/>
                     </a:solidFill>
                   </a:tcPr>
                 </a:tc>
@@ -20413,13 +20365,13 @@
                           </a:solidFill>
                           <a:latin typeface="Calibri"/>
                         </a:rPr>
-                        <a:t>42,31,200</a:t>
+                        <a:t>47,02,910</a:t>
                       </a:r>
                     </a:p>
                   </a:txBody>
                   <a:tcPr marL="109728" marR="109728" marT="45720" marB="45720" anchor="ctr">
                     <a:solidFill>
-                      <a:srgbClr val="FFFFFF"/>
+                      <a:srgbClr val="E9EDF6"/>
                     </a:solidFill>
                   </a:tcPr>
                 </a:tc>
@@ -20530,6 +20482,25 @@
                 </a:solidFill>
                 <a:latin typeface="Calibri"/>
               </a:rPr>
+              <a:t>The pilot line: moulder, moulds, printer, PnP, reflow.</a:t>
+            </a:r>
+          </a:p>
+          <a:p>
+            <a:pPr algn="l">
+              <a:lnSpc>
+                <a:spcPct val="105000"/>
+              </a:lnSpc>
+              <a:spcAft>
+                <a:spcPts val="700"/>
+              </a:spcAft>
+            </a:pPr>
+            <a:r>
+              <a:rPr sz="1300" b="0" i="0">
+                <a:solidFill>
+                  <a:srgbClr val="262626"/>
+                </a:solidFill>
+                <a:latin typeface="Calibri"/>
+              </a:rPr>
               <a:t>Two Nuke Labs engineers for twelve months.</a:t>
             </a:r>
           </a:p>
@@ -20549,7 +20520,7 @@
                 </a:solidFill>
                 <a:latin typeface="Calibri"/>
               </a:rPr>
-              <a:t>Twenty-five pilot sets, enclosure tooling and a test rig.</a:t>
+              <a:t>Twenty-five pilot sets and the test fixtures.</a:t>
             </a:r>
           </a:p>
           <a:p>
@@ -20568,45 +20539,7 @@
                 </a:solidFill>
                 <a:latin typeface="Calibri"/>
               </a:rPr>
-              <a:t>Reference instruments for the validation bench.</a:t>
-            </a:r>
-          </a:p>
-          <a:p>
-            <a:pPr algn="l">
-              <a:lnSpc>
-                <a:spcPct val="105000"/>
-              </a:lnSpc>
-              <a:spcAft>
-                <a:spcPts val="700"/>
-              </a:spcAft>
-            </a:pPr>
-            <a:r>
-              <a:rPr sz="1300" b="0" i="0">
-                <a:solidFill>
-                  <a:srgbClr val="262626"/>
-                </a:solidFill>
-                <a:latin typeface="Calibri"/>
-              </a:rPr>
-              <a:t>Certification, a patent filing and twelve field installations.</a:t>
-            </a:r>
-          </a:p>
-          <a:p>
-            <a:pPr algn="l">
-              <a:lnSpc>
-                <a:spcPct val="105000"/>
-              </a:lnSpc>
-              <a:spcAft>
-                <a:spcPts val="700"/>
-              </a:spcAft>
-            </a:pPr>
-            <a:r>
-              <a:rPr sz="1300" b="0" i="0">
-                <a:solidFill>
-                  <a:srgbClr val="262626"/>
-                </a:solidFill>
-                <a:latin typeface="Calibri"/>
-              </a:rPr>
-              <a:t>Market work with two channel partners.</a:t>
+              <a:t>Twelve field installations.</a:t>
             </a:r>
           </a:p>
         </p:txBody>
@@ -20740,7 +20673,7 @@
                 </a:solidFill>
                 <a:latin typeface="Calibri"/>
               </a:rPr>
-              <a:t>Prototype spend to date is INR 23,587, already invested. This request funds the product, not the prototype.</a:t>
+              <a:t>Prototype spend to date is INR 23,587, already invested. The request builds the line and the product.</a:t>
             </a:r>
           </a:p>
         </p:txBody>
@@ -20956,7 +20889,7 @@
                 </a:solidFill>
                 <a:latin typeface="Calibri"/>
               </a:rPr>
-              <a:t>INR 42.31 lakh turns the prototype into a product.</a:t>
+              <a:t>INR 47.03 lakh builds the pilot line and the product.</a:t>
             </a:r>
           </a:p>
         </p:txBody>
@@ -21090,7 +21023,7 @@
                 </a:solidFill>
                 <a:latin typeface="Calibri"/>
               </a:rPr>
-              <a:t>The grant pays for tooling, certification, pilot units and two engineers, which a first customer will not fund.</a:t>
+              <a:t>The grant pays for the pilot line, the pilot units and two engineers, which a first customer will not fund.</a:t>
             </a:r>
           </a:p>
         </p:txBody>
@@ -21197,7 +21130,7 @@
                 </a:solidFill>
                 <a:latin typeface="Calibri"/>
               </a:rPr>
-              <a:t>INR 42,31,200 over twelve months, inclusive of GST.</a:t>
+              <a:t>INR 47,02,910 over twelve months, GST included.</a:t>
             </a:r>
           </a:p>
           <a:p>
@@ -21216,7 +21149,7 @@
                 </a:solidFill>
                 <a:latin typeface="Calibri"/>
               </a:rPr>
-              <a:t>That is 85 percent of the programme ceiling.</a:t>
+              <a:t>That is 94 percent of the programme ceiling.</a:t>
             </a:r>
           </a:p>
         </p:txBody>
@@ -21449,7 +21382,7 @@
                 </a:solidFill>
                 <a:latin typeface="Calibri"/>
               </a:rPr>
-              <a:t>15.69 lakh at T0, 16.40 lakh at month 6, 10.22 lakh at month 12.</a:t>
+              <a:t>25.66 lakh at T0, 16.24 lakh at month 6, 5.13 lakh at month 12.</a:t>
             </a:r>
           </a:p>
           <a:p>
@@ -28748,7 +28681,7 @@
                           </a:solidFill>
                           <a:latin typeface="Calibri"/>
                         </a:rPr>
-                        <a:t>Design freeze and tooling</a:t>
+                        <a:t>Design freeze and line procurement</a:t>
                       </a:r>
                     </a:p>
                   </a:txBody>
@@ -28794,7 +28727,7 @@
                           </a:solidFill>
                           <a:latin typeface="Calibri"/>
                         </a:rPr>
-                        <a:t>Moulds ordered, five pilot sets built, certification scope agreed</a:t>
+                        <a:t>Line installed, design frozen, certification scope agreed</a:t>
                       </a:r>
                     </a:p>
                   </a:txBody>

--- a/docs/office/TankGuard_Presentation.pptx
+++ b/docs/office/TankGuard_Presentation.pptx
@@ -21995,7 +21995,7 @@
                 </a:solidFill>
                 <a:latin typeface="Calibri"/>
               </a:rPr>
-              <a:t>Certification and a patent filed, with the unit cost proven.</a:t>
+              <a:t>Certification filed, with the unit cost proven.</a:t>
             </a:r>
           </a:p>
           <a:p>
@@ -29009,7 +29009,7 @@
                           </a:solidFill>
                           <a:latin typeface="Calibri"/>
                         </a:rPr>
-                        <a:t>Certification and patent filed, 3 paying pilots, TRL 8</a:t>
+                        <a:t>Certification filed, 3 paying pilots, TRL 8</a:t>
                       </a:r>
                     </a:p>
                   </a:txBody>

--- a/docs/office/TankGuard_Presentation.pptx
+++ b/docs/office/TankGuard_Presentation.pptx
@@ -21275,7 +21275,7 @@
                 </a:solidFill>
                 <a:latin typeface="Calibri"/>
               </a:rPr>
-              <a:t>The monitor, dashboard and planner already run.</a:t>
+              <a:t>The arm has run in a 500 L tank; the monitor and planner run.</a:t>
             </a:r>
           </a:p>
         </p:txBody>
@@ -21743,7 +21743,7 @@
                 </a:solidFill>
                 <a:latin typeface="Calibri"/>
               </a:rPr>
-              <a:t>A working monitor today. A certified system in twelve months.</a:t>
+              <a:t>A working arm in a real tank. A certified system in twelve months.</a:t>
             </a:r>
           </a:p>
         </p:txBody>
@@ -26785,7 +26785,7 @@
                 </a:solidFill>
                 <a:latin typeface="Calibri"/>
               </a:rPr>
-              <a:t>The monitoring prototype is built and runs at TRL 6.</a:t>
+              <a:t>The monitor runs at TRL 6. The arm has run in a real tank at TRL 7.</a:t>
             </a:r>
           </a:p>
         </p:txBody>
@@ -26919,7 +26919,7 @@
                 </a:solidFill>
                 <a:latin typeface="Calibri"/>
               </a:rPr>
-              <a:t>INR 23,587 of prototype parts, already invested. The grant funds the arm hardware, the home unit build and certification.</a:t>
+              <a:t>INR 23,587 invested. Both joints ran in a 500 L tank in October 2026; the grant builds the line and the pilot units.</a:t>
             </a:r>
           </a:p>
         </p:txBody>
@@ -27278,7 +27278,7 @@
                 </a:solidFill>
                 <a:latin typeface="Calibri"/>
               </a:rPr>
-              <a:t>Compiles for the ESP32.</a:t>
+              <a:t>Compiles for the ESP8266.</a:t>
             </a:r>
           </a:p>
           <a:p>
